--- a/SimReal-BP-v29.pptx
+++ b/SimReal-BP-v29.pptx
@@ -10279,7 +10279,7 @@
         <p:spPr>
           <a:xfrm>
             <a:off x="548640" y="4882896"/>
-            <a:ext cx="3544824" cy="1024128"/>
+            <a:ext cx="3544824" cy="1152144"/>
           </a:xfrm>
           <a:prstGeom prst="rect">
             <a:avLst/>
@@ -10429,7 +10429,7 @@
         <p:spPr>
           <a:xfrm>
             <a:off x="4322064" y="4882896"/>
-            <a:ext cx="3544824" cy="1024128"/>
+            <a:ext cx="3544824" cy="1152144"/>
           </a:xfrm>
           <a:prstGeom prst="rect">
             <a:avLst/>
@@ -10579,7 +10579,7 @@
         <p:spPr>
           <a:xfrm>
             <a:off x="8095488" y="4882896"/>
-            <a:ext cx="3544824" cy="1024128"/>
+            <a:ext cx="3544824" cy="1152144"/>
           </a:xfrm>
           <a:prstGeom prst="rect">
             <a:avLst/>
@@ -10715,7 +10715,30 @@
                 <a:cs typeface="Instrument Sans"/>
                 <a:sym typeface="Instrument Sans"/>
               </a:rPr>
-              <a:t>agent开发者付费练习，默认保密</a:t>
+              <a:t>agent付费练习，默认保密</a:t>
+            </a:r>
+          </a:p>
+          <a:p>
+            <a:pPr marL="0" marR="0" lvl="0" indent="0" algn="l" rtl="0">
+              <a:spcBef>
+                <a:spcPts val="367"/>
+              </a:spcBef>
+              <a:spcAft>
+                <a:spcPts val="0"/>
+              </a:spcAft>
+              <a:buNone/>
+            </a:pPr>
+            <a:r>
+              <a:rPr lang="zh-CN" sz="1050" b="0" i="0" u="none" strike="noStrike" cap="none">
+                <a:solidFill>
+                  <a:srgbClr val="33322F"/>
+                </a:solidFill>
+                <a:latin typeface="Instrument Sans"/>
+                <a:ea typeface="Instrument Sans"/>
+                <a:cs typeface="Instrument Sans"/>
+                <a:sym typeface="Instrument Sans"/>
+              </a:rPr>
+              <a:t>或脱敏共享轨迹，换练习额度与收益分成</a:t>
             </a:r>
           </a:p>
         </p:txBody>
@@ -30915,7 +30938,7 @@
                 <a:cs typeface="Newsreader"/>
                 <a:sym typeface="Newsreader"/>
               </a:rPr>
-              <a:t>下一步 · 个人agent</a:t>
+              <a:t>个人agent</a:t>
             </a:r>
           </a:p>
         </p:txBody>
@@ -31025,7 +31048,7 @@
                 <a:cs typeface="IBM Plex Mono"/>
                 <a:sym typeface="IBM Plex Mono"/>
               </a:rPr>
-              <a:t>2026年9月：个人agent竞赛开打</a:t>
+              <a:t>个人agent已经来了</a:t>
             </a:r>
           </a:p>
         </p:txBody>
@@ -31067,8 +31090,8 @@
         </p:nvSpPr>
         <p:spPr>
           <a:xfrm>
-            <a:off x="548640" y="1865376"/>
-            <a:ext cx="2567178" cy="201168"/>
+            <a:off x="548640" y="1883664"/>
+            <a:ext cx="2567178" cy="658368"/>
           </a:xfrm>
           <a:prstGeom prst="rect">
             <a:avLst/>
@@ -31094,7 +31117,524 @@
               <a:buNone/>
             </a:pPr>
             <a:r>
-              <a:rPr lang="zh-CN" sz="950" b="0" i="0" u="none" strike="noStrike" cap="none">
+              <a:rPr lang="zh-CN" sz="4000" b="0" i="0" u="none" strike="noStrike" cap="none">
+                <a:solidFill>
+                  <a:srgbClr val="111110"/>
+                </a:solidFill>
+                <a:latin typeface="Newsreader"/>
+                <a:ea typeface="Newsreader"/>
+                <a:cs typeface="Newsreader"/>
+                <a:sym typeface="Newsreader"/>
+              </a:rPr>
+              <a:t>Muse</a:t>
+            </a:r>
+          </a:p>
+        </p:txBody>
+      </p:sp>
+      <p:sp>
+        <p:nvSpPr>
+          <p:cNvPr id="5008" name="SimReal 5008"/>
+          <p:cNvSpPr txBox="1"/>
+          <p:nvPr/>
+        </p:nvSpPr>
+        <p:spPr>
+          <a:xfrm>
+            <a:off x="548640" y="2596896"/>
+            <a:ext cx="2567178" cy="457200"/>
+          </a:xfrm>
+          <a:prstGeom prst="rect">
+            <a:avLst/>
+          </a:prstGeom>
+          <a:noFill/>
+          <a:ln>
+            <a:noFill/>
+          </a:ln>
+        </p:spPr>
+        <p:txBody>
+          <a:bodyPr spcFirstLastPara="1" wrap="square" lIns="0" tIns="0" rIns="0" bIns="0" anchor="t" anchorCtr="0">
+            <a:noAutofit/>
+          </a:bodyPr>
+          <a:lstStyle/>
+          <a:p>
+            <a:pPr marL="0" marR="0" lvl="0" indent="0" algn="l" rtl="0">
+              <a:lnSpc>
+                <a:spcPct val="110000"/>
+              </a:lnSpc>
+              <a:spcBef>
+                <a:spcPts val="0"/>
+              </a:spcBef>
+              <a:spcAft>
+                <a:spcPts val="0"/>
+              </a:spcAft>
+              <a:buNone/>
+            </a:pPr>
+            <a:r>
+              <a:rPr lang="zh-CN" sz="1200" b="0" i="0" u="none" strike="noStrike" cap="none">
+                <a:solidFill>
+                  <a:srgbClr val="33322F"/>
+                </a:solidFill>
+                <a:latin typeface="Instrument Sans"/>
+                <a:ea typeface="Instrument Sans"/>
+                <a:cs typeface="Instrument Sans"/>
+                <a:sym typeface="Instrument Sans"/>
+              </a:rPr>
+              <a:t>Meta，9月8日上线</a:t>
+            </a:r>
+          </a:p>
+        </p:txBody>
+      </p:sp>
+      <p:sp>
+        <p:nvSpPr>
+          <p:cNvPr id="5009" name="SimReal 5009"/>
+          <p:cNvSpPr/>
+          <p:nvPr/>
+        </p:nvSpPr>
+        <p:spPr>
+          <a:xfrm>
+            <a:off x="3390138" y="1755648"/>
+            <a:ext cx="2567178" cy="18288"/>
+          </a:xfrm>
+          <a:prstGeom prst="rect">
+            <a:avLst/>
+          </a:prstGeom>
+          <a:solidFill>
+            <a:srgbClr val="111110"/>
+          </a:solidFill>
+          <a:ln>
+            <a:noFill/>
+          </a:ln>
+        </p:spPr>
+        <p:txBody>
+          <a:bodyPr/>
+          <a:lstStyle/>
+          <a:p>
+            <a:endParaRPr/>
+          </a:p>
+        </p:txBody>
+      </p:sp>
+      <p:sp>
+        <p:nvSpPr>
+          <p:cNvPr id="5010" name="SimReal 5010"/>
+          <p:cNvSpPr txBox="1"/>
+          <p:nvPr/>
+        </p:nvSpPr>
+        <p:spPr>
+          <a:xfrm>
+            <a:off x="3390138" y="1883664"/>
+            <a:ext cx="2567178" cy="658368"/>
+          </a:xfrm>
+          <a:prstGeom prst="rect">
+            <a:avLst/>
+          </a:prstGeom>
+          <a:noFill/>
+          <a:ln>
+            <a:noFill/>
+          </a:ln>
+        </p:spPr>
+        <p:txBody>
+          <a:bodyPr spcFirstLastPara="1" wrap="square" lIns="0" tIns="0" rIns="0" bIns="0" anchor="t" anchorCtr="0">
+            <a:noAutofit/>
+          </a:bodyPr>
+          <a:lstStyle/>
+          <a:p>
+            <a:pPr marL="0" marR="0" lvl="0" indent="0" algn="l" rtl="0">
+              <a:spcBef>
+                <a:spcPts val="0"/>
+              </a:spcBef>
+              <a:spcAft>
+                <a:spcPts val="0"/>
+              </a:spcAft>
+              <a:buNone/>
+            </a:pPr>
+            <a:r>
+              <a:rPr lang="zh-CN" sz="4000" b="0" i="0" u="none" strike="noStrike" cap="none">
+                <a:solidFill>
+                  <a:srgbClr val="111110"/>
+                </a:solidFill>
+                <a:latin typeface="Newsreader"/>
+                <a:ea typeface="Newsreader"/>
+                <a:cs typeface="Newsreader"/>
+                <a:sym typeface="Newsreader"/>
+              </a:rPr>
+              <a:t>Dots</a:t>
+            </a:r>
+          </a:p>
+        </p:txBody>
+      </p:sp>
+      <p:sp>
+        <p:nvSpPr>
+          <p:cNvPr id="5011" name="SimReal 5011"/>
+          <p:cNvSpPr txBox="1"/>
+          <p:nvPr/>
+        </p:nvSpPr>
+        <p:spPr>
+          <a:xfrm>
+            <a:off x="3390138" y="2596896"/>
+            <a:ext cx="2567178" cy="457200"/>
+          </a:xfrm>
+          <a:prstGeom prst="rect">
+            <a:avLst/>
+          </a:prstGeom>
+          <a:noFill/>
+          <a:ln>
+            <a:noFill/>
+          </a:ln>
+        </p:spPr>
+        <p:txBody>
+          <a:bodyPr spcFirstLastPara="1" wrap="square" lIns="0" tIns="0" rIns="0" bIns="0" anchor="t" anchorCtr="0">
+            <a:noAutofit/>
+          </a:bodyPr>
+          <a:lstStyle/>
+          <a:p>
+            <a:pPr marL="0" marR="0" lvl="0" indent="0" algn="l" rtl="0">
+              <a:lnSpc>
+                <a:spcPct val="110000"/>
+              </a:lnSpc>
+              <a:spcBef>
+                <a:spcPts val="0"/>
+              </a:spcBef>
+              <a:spcAft>
+                <a:spcPts val="0"/>
+              </a:spcAft>
+              <a:buNone/>
+            </a:pPr>
+            <a:r>
+              <a:rPr lang="zh-CN" sz="1200" b="0" i="0" u="none" strike="noStrike" cap="none">
+                <a:solidFill>
+                  <a:srgbClr val="33322F"/>
+                </a:solidFill>
+                <a:latin typeface="Instrument Sans"/>
+                <a:ea typeface="Instrument Sans"/>
+                <a:cs typeface="Instrument Sans"/>
+                <a:sym typeface="Instrument Sans"/>
+              </a:rPr>
+              <a:t>OpenAI，9月29日发布</a:t>
+            </a:r>
+          </a:p>
+        </p:txBody>
+      </p:sp>
+      <p:sp>
+        <p:nvSpPr>
+          <p:cNvPr id="5012" name="SimReal 5012"/>
+          <p:cNvSpPr/>
+          <p:nvPr/>
+        </p:nvSpPr>
+        <p:spPr>
+          <a:xfrm>
+            <a:off x="6231636" y="1755648"/>
+            <a:ext cx="2567178" cy="18288"/>
+          </a:xfrm>
+          <a:prstGeom prst="rect">
+            <a:avLst/>
+          </a:prstGeom>
+          <a:solidFill>
+            <a:srgbClr val="111110"/>
+          </a:solidFill>
+          <a:ln>
+            <a:noFill/>
+          </a:ln>
+        </p:spPr>
+        <p:txBody>
+          <a:bodyPr/>
+          <a:lstStyle/>
+          <a:p>
+            <a:endParaRPr/>
+          </a:p>
+        </p:txBody>
+      </p:sp>
+      <p:sp>
+        <p:nvSpPr>
+          <p:cNvPr id="5013" name="SimReal 5013"/>
+          <p:cNvSpPr txBox="1"/>
+          <p:nvPr/>
+        </p:nvSpPr>
+        <p:spPr>
+          <a:xfrm>
+            <a:off x="6231636" y="1883664"/>
+            <a:ext cx="2567178" cy="658368"/>
+          </a:xfrm>
+          <a:prstGeom prst="rect">
+            <a:avLst/>
+          </a:prstGeom>
+          <a:noFill/>
+          <a:ln>
+            <a:noFill/>
+          </a:ln>
+        </p:spPr>
+        <p:txBody>
+          <a:bodyPr spcFirstLastPara="1" wrap="square" lIns="0" tIns="0" rIns="0" bIns="0" anchor="t" anchorCtr="0">
+            <a:noAutofit/>
+          </a:bodyPr>
+          <a:lstStyle/>
+          <a:p>
+            <a:pPr marL="0" marR="0" lvl="0" indent="0" algn="l" rtl="0">
+              <a:spcBef>
+                <a:spcPts val="0"/>
+              </a:spcBef>
+              <a:spcAft>
+                <a:spcPts val="0"/>
+              </a:spcAft>
+              <a:buNone/>
+            </a:pPr>
+            <a:r>
+              <a:rPr lang="zh-CN" sz="4000" b="0" i="0" u="none" strike="noStrike" cap="none">
+                <a:solidFill>
+                  <a:srgbClr val="111110"/>
+                </a:solidFill>
+                <a:latin typeface="Newsreader"/>
+                <a:ea typeface="Newsreader"/>
+                <a:cs typeface="Newsreader"/>
+                <a:sym typeface="Newsreader"/>
+              </a:rPr>
+              <a:t>100亿美元</a:t>
+            </a:r>
+          </a:p>
+        </p:txBody>
+      </p:sp>
+      <p:sp>
+        <p:nvSpPr>
+          <p:cNvPr id="5014" name="SimReal 5014"/>
+          <p:cNvSpPr txBox="1"/>
+          <p:nvPr/>
+        </p:nvSpPr>
+        <p:spPr>
+          <a:xfrm>
+            <a:off x="6231636" y="2596896"/>
+            <a:ext cx="2567178" cy="457200"/>
+          </a:xfrm>
+          <a:prstGeom prst="rect">
+            <a:avLst/>
+          </a:prstGeom>
+          <a:noFill/>
+          <a:ln>
+            <a:noFill/>
+          </a:ln>
+        </p:spPr>
+        <p:txBody>
+          <a:bodyPr spcFirstLastPara="1" wrap="square" lIns="0" tIns="0" rIns="0" bIns="0" anchor="t" anchorCtr="0">
+            <a:noAutofit/>
+          </a:bodyPr>
+          <a:lstStyle/>
+          <a:p>
+            <a:pPr marL="0" marR="0" lvl="0" indent="0" algn="l" rtl="0">
+              <a:lnSpc>
+                <a:spcPct val="110000"/>
+              </a:lnSpc>
+              <a:spcBef>
+                <a:spcPts val="0"/>
+              </a:spcBef>
+              <a:spcAft>
+                <a:spcPts val="0"/>
+              </a:spcAft>
+              <a:buNone/>
+            </a:pPr>
+            <a:r>
+              <a:rPr lang="zh-CN" sz="1200" b="0" i="0" u="none" strike="noStrike" cap="none">
+                <a:solidFill>
+                  <a:srgbClr val="33322F"/>
+                </a:solidFill>
+                <a:latin typeface="Instrument Sans"/>
+                <a:ea typeface="Instrument Sans"/>
+                <a:cs typeface="Instrument Sans"/>
+                <a:sym typeface="Instrument Sans"/>
+              </a:rPr>
+              <a:t>Instinct估值，33天涨4倍</a:t>
+            </a:r>
+          </a:p>
+        </p:txBody>
+      </p:sp>
+      <p:sp>
+        <p:nvSpPr>
+          <p:cNvPr id="5015" name="SimReal 5015"/>
+          <p:cNvSpPr/>
+          <p:nvPr/>
+        </p:nvSpPr>
+        <p:spPr>
+          <a:xfrm>
+            <a:off x="9073134" y="1755648"/>
+            <a:ext cx="2567178" cy="18288"/>
+          </a:xfrm>
+          <a:prstGeom prst="rect">
+            <a:avLst/>
+          </a:prstGeom>
+          <a:solidFill>
+            <a:srgbClr val="C2410C"/>
+          </a:solidFill>
+          <a:ln>
+            <a:noFill/>
+          </a:ln>
+        </p:spPr>
+        <p:txBody>
+          <a:bodyPr/>
+          <a:lstStyle/>
+          <a:p>
+            <a:endParaRPr/>
+          </a:p>
+        </p:txBody>
+      </p:sp>
+      <p:sp>
+        <p:nvSpPr>
+          <p:cNvPr id="5016" name="SimReal 5016"/>
+          <p:cNvSpPr txBox="1"/>
+          <p:nvPr/>
+        </p:nvSpPr>
+        <p:spPr>
+          <a:xfrm>
+            <a:off x="9073134" y="1883664"/>
+            <a:ext cx="2567178" cy="658368"/>
+          </a:xfrm>
+          <a:prstGeom prst="rect">
+            <a:avLst/>
+          </a:prstGeom>
+          <a:noFill/>
+          <a:ln>
+            <a:noFill/>
+          </a:ln>
+        </p:spPr>
+        <p:txBody>
+          <a:bodyPr spcFirstLastPara="1" wrap="square" lIns="0" tIns="0" rIns="0" bIns="0" anchor="t" anchorCtr="0">
+            <a:noAutofit/>
+          </a:bodyPr>
+          <a:lstStyle/>
+          <a:p>
+            <a:pPr marL="0" marR="0" lvl="0" indent="0" algn="l" rtl="0">
+              <a:spcBef>
+                <a:spcPts val="0"/>
+              </a:spcBef>
+              <a:spcAft>
+                <a:spcPts val="0"/>
+              </a:spcAft>
+              <a:buNone/>
+            </a:pPr>
+            <a:r>
+              <a:rPr lang="zh-CN" sz="4000" b="0" i="0" u="none" strike="noStrike" cap="none">
+                <a:solidFill>
+                  <a:srgbClr val="C2410C"/>
+                </a:solidFill>
+                <a:latin typeface="Newsreader"/>
+                <a:ea typeface="Newsreader"/>
+                <a:cs typeface="Newsreader"/>
+                <a:sym typeface="Newsreader"/>
+              </a:rPr>
+              <a:t>16.1%</a:t>
+            </a:r>
+          </a:p>
+        </p:txBody>
+      </p:sp>
+      <p:sp>
+        <p:nvSpPr>
+          <p:cNvPr id="5017" name="SimReal 5017"/>
+          <p:cNvSpPr txBox="1"/>
+          <p:nvPr/>
+        </p:nvSpPr>
+        <p:spPr>
+          <a:xfrm>
+            <a:off x="9073134" y="2596896"/>
+            <a:ext cx="2567178" cy="457200"/>
+          </a:xfrm>
+          <a:prstGeom prst="rect">
+            <a:avLst/>
+          </a:prstGeom>
+          <a:noFill/>
+          <a:ln>
+            <a:noFill/>
+          </a:ln>
+        </p:spPr>
+        <p:txBody>
+          <a:bodyPr spcFirstLastPara="1" wrap="square" lIns="0" tIns="0" rIns="0" bIns="0" anchor="t" anchorCtr="0">
+            <a:noAutofit/>
+          </a:bodyPr>
+          <a:lstStyle/>
+          <a:p>
+            <a:pPr marL="0" marR="0" lvl="0" indent="0" algn="l" rtl="0">
+              <a:lnSpc>
+                <a:spcPct val="110000"/>
+              </a:lnSpc>
+              <a:spcBef>
+                <a:spcPts val="0"/>
+              </a:spcBef>
+              <a:spcAft>
+                <a:spcPts val="0"/>
+              </a:spcAft>
+              <a:buNone/>
+            </a:pPr>
+            <a:r>
+              <a:rPr lang="zh-CN" sz="1200" b="0" i="0" u="none" strike="noStrike" cap="none">
+                <a:solidFill>
+                  <a:srgbClr val="33322F"/>
+                </a:solidFill>
+                <a:latin typeface="Instrument Sans"/>
+                <a:ea typeface="Instrument Sans"/>
+                <a:cs typeface="Instrument Sans"/>
+                <a:sym typeface="Instrument Sans"/>
+              </a:rPr>
+              <a:t>但最强模型只做好</a:t>
+            </a:r>
+          </a:p>
+          <a:p>
+            <a:pPr marL="0" marR="0" lvl="0" indent="0" algn="l" rtl="0">
+              <a:lnSpc>
+                <a:spcPct val="110000"/>
+              </a:lnSpc>
+              <a:spcBef>
+                <a:spcPts val="0"/>
+              </a:spcBef>
+              <a:spcAft>
+                <a:spcPts val="0"/>
+              </a:spcAft>
+              <a:buNone/>
+            </a:pPr>
+            <a:r>
+              <a:rPr lang="zh-CN" sz="1200" b="0" i="0" u="none" strike="noStrike" cap="none">
+                <a:solidFill>
+                  <a:srgbClr val="33322F"/>
+                </a:solidFill>
+                <a:latin typeface="Instrument Sans"/>
+                <a:ea typeface="Instrument Sans"/>
+                <a:cs typeface="Instrument Sans"/>
+                <a:sym typeface="Instrument Sans"/>
+              </a:rPr>
+              <a:t>16.1%的真实外包项目</a:t>
+            </a:r>
+          </a:p>
+        </p:txBody>
+      </p:sp>
+      <p:sp>
+        <p:nvSpPr>
+          <p:cNvPr id="5018" name="SimReal 5018"/>
+          <p:cNvSpPr txBox="1"/>
+          <p:nvPr/>
+        </p:nvSpPr>
+        <p:spPr>
+          <a:xfrm>
+            <a:off x="548640" y="3529584"/>
+            <a:ext cx="7315200" cy="201168"/>
+          </a:xfrm>
+          <a:prstGeom prst="rect">
+            <a:avLst/>
+          </a:prstGeom>
+          <a:noFill/>
+          <a:ln>
+            <a:noFill/>
+          </a:ln>
+        </p:spPr>
+        <p:txBody>
+          <a:bodyPr spcFirstLastPara="1" wrap="square" lIns="0" tIns="0" rIns="0" bIns="0" anchor="t" anchorCtr="0">
+            <a:noAutofit/>
+          </a:bodyPr>
+          <a:lstStyle/>
+          <a:p>
+            <a:pPr marL="0" marR="0" lvl="0" indent="0" algn="l" rtl="0">
+              <a:spcBef>
+                <a:spcPts val="0"/>
+              </a:spcBef>
+              <a:spcAft>
+                <a:spcPts val="0"/>
+              </a:spcAft>
+              <a:buNone/>
+            </a:pPr>
+            <a:r>
+              <a:rPr lang="zh-CN" sz="1000" b="0" i="0" u="none" strike="noStrike" cap="none">
                 <a:solidFill>
                   <a:srgbClr val="6E6C66"/>
                 </a:solidFill>
@@ -31103,662 +31643,119 @@
                 <a:cs typeface="IBM Plex Mono"/>
                 <a:sym typeface="IBM Plex Mono"/>
               </a:rPr>
-              <a:t>Meta · 9月8日</a:t>
-            </a:r>
-          </a:p>
-        </p:txBody>
-      </p:sp>
-      <p:sp>
-        <p:nvSpPr>
-          <p:cNvPr id="5008" name="SimReal 5008"/>
-          <p:cNvSpPr txBox="1"/>
-          <p:nvPr/>
-        </p:nvSpPr>
-        <p:spPr>
-          <a:xfrm>
-            <a:off x="548640" y="2084832"/>
-            <a:ext cx="2567178" cy="566928"/>
-          </a:xfrm>
-          <a:prstGeom prst="rect">
-            <a:avLst/>
-          </a:prstGeom>
-          <a:noFill/>
-          <a:ln>
-            <a:noFill/>
-          </a:ln>
-        </p:spPr>
-        <p:txBody>
-          <a:bodyPr spcFirstLastPara="1" wrap="square" lIns="0" tIns="0" rIns="0" bIns="0" anchor="t" anchorCtr="0">
-            <a:noAutofit/>
-          </a:bodyPr>
-          <a:lstStyle/>
-          <a:p>
-            <a:pPr marL="0" marR="0" lvl="0" indent="0" algn="l" rtl="0">
-              <a:spcBef>
-                <a:spcPts val="0"/>
-              </a:spcBef>
-              <a:spcAft>
-                <a:spcPts val="0"/>
-              </a:spcAft>
-              <a:buNone/>
-            </a:pPr>
-            <a:r>
-              <a:rPr lang="zh-CN" sz="3200" b="0" i="0" u="none" strike="noStrike" cap="none">
-                <a:solidFill>
-                  <a:srgbClr val="C2410C"/>
+              <a:t>所以，先在我们的世界里练</a:t>
+            </a:r>
+          </a:p>
+        </p:txBody>
+      </p:sp>
+      <p:sp>
+        <p:nvSpPr>
+          <p:cNvPr id="5019" name="SimReal 5019"/>
+          <p:cNvSpPr txBox="1"/>
+          <p:nvPr/>
+        </p:nvSpPr>
+        <p:spPr>
+          <a:xfrm>
+            <a:off x="548640" y="3767328"/>
+            <a:ext cx="11091672" cy="457200"/>
+          </a:xfrm>
+          <a:prstGeom prst="rect">
+            <a:avLst/>
+          </a:prstGeom>
+          <a:noFill/>
+          <a:ln>
+            <a:noFill/>
+          </a:ln>
+        </p:spPr>
+        <p:txBody>
+          <a:bodyPr spcFirstLastPara="1" wrap="square" lIns="0" tIns="0" rIns="0" bIns="0" anchor="ctr" anchorCtr="0">
+            <a:noAutofit/>
+          </a:bodyPr>
+          <a:lstStyle/>
+          <a:p>
+            <a:pPr marL="0" marR="0" lvl="0" indent="0" algn="l" rtl="0">
+              <a:spcBef>
+                <a:spcPts val="0"/>
+              </a:spcBef>
+              <a:spcAft>
+                <a:spcPts val="0"/>
+              </a:spcAft>
+              <a:buNone/>
+            </a:pPr>
+            <a:r>
+              <a:rPr lang="zh-CN" sz="2200" b="0" i="0" u="none" strike="noStrike" cap="none">
+                <a:solidFill>
+                  <a:srgbClr val="111110"/>
                 </a:solidFill>
                 <a:latin typeface="Newsreader"/>
                 <a:ea typeface="Newsreader"/>
                 <a:cs typeface="Newsreader"/>
                 <a:sym typeface="Newsreader"/>
               </a:rPr>
-              <a:t>Muse</a:t>
-            </a:r>
-          </a:p>
-        </p:txBody>
-      </p:sp>
-      <p:sp>
-        <p:nvSpPr>
-          <p:cNvPr id="5009" name="SimReal 5009"/>
-          <p:cNvSpPr txBox="1"/>
-          <p:nvPr/>
-        </p:nvSpPr>
-        <p:spPr>
-          <a:xfrm>
-            <a:off x="548640" y="2706624"/>
-            <a:ext cx="2567178" cy="457200"/>
-          </a:xfrm>
-          <a:prstGeom prst="rect">
-            <a:avLst/>
-          </a:prstGeom>
-          <a:noFill/>
-          <a:ln>
-            <a:noFill/>
-          </a:ln>
-        </p:spPr>
-        <p:txBody>
-          <a:bodyPr spcFirstLastPara="1" wrap="square" lIns="0" tIns="0" rIns="0" bIns="0" anchor="t" anchorCtr="0">
-            <a:noAutofit/>
-          </a:bodyPr>
-          <a:lstStyle/>
-          <a:p>
-            <a:pPr marL="0" marR="0" lvl="0" indent="0" algn="l" rtl="0">
-              <a:lnSpc>
-                <a:spcPct val="110000"/>
-              </a:lnSpc>
-              <a:spcBef>
-                <a:spcPts val="0"/>
-              </a:spcBef>
-              <a:spcAft>
-                <a:spcPts val="0"/>
-              </a:spcAft>
-              <a:buNone/>
-            </a:pPr>
-            <a:r>
-              <a:rPr lang="zh-CN" sz="1050" b="0" i="0" u="none" strike="noStrike" cap="none">
-                <a:solidFill>
-                  <a:srgbClr val="33322F"/>
-                </a:solidFill>
-                <a:latin typeface="Instrument Sans"/>
-                <a:ea typeface="Instrument Sans"/>
-                <a:cs typeface="Instrument Sans"/>
-                <a:sym typeface="Instrument Sans"/>
-              </a:rPr>
-              <a:t>上线个人agent，替人订票、购物、</a:t>
-            </a:r>
-          </a:p>
-          <a:p>
-            <a:pPr marL="0" marR="0" lvl="0" indent="0" algn="l" rtl="0">
-              <a:lnSpc>
-                <a:spcPct val="110000"/>
-              </a:lnSpc>
-              <a:spcBef>
-                <a:spcPts val="0"/>
-              </a:spcBef>
-              <a:spcAft>
-                <a:spcPts val="0"/>
-              </a:spcAft>
-              <a:buNone/>
-            </a:pPr>
-            <a:r>
-              <a:rPr lang="zh-CN" sz="1050" b="0" i="0" u="none" strike="noStrike" cap="none">
-                <a:solidFill>
-                  <a:srgbClr val="33322F"/>
-                </a:solidFill>
-                <a:latin typeface="Instrument Sans"/>
-                <a:ea typeface="Instrument Sans"/>
-                <a:cs typeface="Instrument Sans"/>
-                <a:sym typeface="Instrument Sans"/>
-              </a:rPr>
-              <a:t>约时间；两周后被亚马逊屏蔽</a:t>
-            </a:r>
-          </a:p>
-        </p:txBody>
-      </p:sp>
-      <p:sp>
-        <p:nvSpPr>
-          <p:cNvPr id="5010" name="SimReal 5010"/>
-          <p:cNvSpPr/>
-          <p:nvPr/>
-        </p:nvSpPr>
-        <p:spPr>
-          <a:xfrm>
-            <a:off x="3390138" y="1755648"/>
-            <a:ext cx="2567178" cy="18288"/>
-          </a:xfrm>
-          <a:prstGeom prst="rect">
-            <a:avLst/>
-          </a:prstGeom>
-          <a:solidFill>
-            <a:srgbClr val="111110"/>
-          </a:solidFill>
-          <a:ln>
-            <a:noFill/>
-          </a:ln>
-        </p:spPr>
-        <p:txBody>
-          <a:bodyPr/>
-          <a:lstStyle/>
-          <a:p>
-            <a:endParaRPr/>
-          </a:p>
-        </p:txBody>
-      </p:sp>
-      <p:sp>
-        <p:nvSpPr>
-          <p:cNvPr id="5011" name="SimReal 5011"/>
-          <p:cNvSpPr txBox="1"/>
-          <p:nvPr/>
-        </p:nvSpPr>
-        <p:spPr>
-          <a:xfrm>
-            <a:off x="3390138" y="1865376"/>
-            <a:ext cx="2567178" cy="201168"/>
-          </a:xfrm>
-          <a:prstGeom prst="rect">
-            <a:avLst/>
-          </a:prstGeom>
-          <a:noFill/>
-          <a:ln>
-            <a:noFill/>
-          </a:ln>
-        </p:spPr>
-        <p:txBody>
-          <a:bodyPr spcFirstLastPara="1" wrap="square" lIns="0" tIns="0" rIns="0" bIns="0" anchor="t" anchorCtr="0">
-            <a:noAutofit/>
-          </a:bodyPr>
-          <a:lstStyle/>
-          <a:p>
-            <a:pPr marL="0" marR="0" lvl="0" indent="0" algn="l" rtl="0">
-              <a:spcBef>
-                <a:spcPts val="0"/>
-              </a:spcBef>
-              <a:spcAft>
-                <a:spcPts val="0"/>
-              </a:spcAft>
-              <a:buNone/>
-            </a:pPr>
-            <a:r>
-              <a:rPr lang="zh-CN" sz="950" b="0" i="0" u="none" strike="noStrike" cap="none">
+              <a:t>进场练习</a:t>
+            </a:r>
+            <a:r>
+              <a:rPr lang="zh-CN" sz="1600" b="0" i="0" u="none" strike="noStrike" cap="none">
                 <a:solidFill>
                   <a:srgbClr val="6E6C66"/>
                 </a:solidFill>
-                <a:latin typeface="IBM Plex Mono"/>
-                <a:ea typeface="IBM Plex Mono"/>
-                <a:cs typeface="IBM Plex Mono"/>
-                <a:sym typeface="IBM Plex Mono"/>
-              </a:rPr>
-              <a:t>OpenAI · 9月29日</a:t>
-            </a:r>
-          </a:p>
-        </p:txBody>
-      </p:sp>
-      <p:sp>
-        <p:nvSpPr>
-          <p:cNvPr id="5012" name="SimReal 5012"/>
-          <p:cNvSpPr txBox="1"/>
-          <p:nvPr/>
-        </p:nvSpPr>
-        <p:spPr>
-          <a:xfrm>
-            <a:off x="3390138" y="2084832"/>
-            <a:ext cx="2567178" cy="566928"/>
-          </a:xfrm>
-          <a:prstGeom prst="rect">
-            <a:avLst/>
-          </a:prstGeom>
-          <a:noFill/>
-          <a:ln>
-            <a:noFill/>
-          </a:ln>
-        </p:spPr>
-        <p:txBody>
-          <a:bodyPr spcFirstLastPara="1" wrap="square" lIns="0" tIns="0" rIns="0" bIns="0" anchor="t" anchorCtr="0">
-            <a:noAutofit/>
-          </a:bodyPr>
-          <a:lstStyle/>
-          <a:p>
-            <a:pPr marL="0" marR="0" lvl="0" indent="0" algn="l" rtl="0">
-              <a:spcBef>
-                <a:spcPts val="0"/>
-              </a:spcBef>
-              <a:spcAft>
-                <a:spcPts val="0"/>
-              </a:spcAft>
-              <a:buNone/>
-            </a:pPr>
-            <a:r>
-              <a:rPr lang="zh-CN" sz="3200" b="0" i="0" u="none" strike="noStrike" cap="none">
-                <a:solidFill>
-                  <a:srgbClr val="C2410C"/>
+                <a:latin typeface="Instrument Sans"/>
+                <a:ea typeface="Instrument Sans"/>
+                <a:cs typeface="Instrument Sans"/>
+                <a:sym typeface="Instrument Sans"/>
+              </a:rPr>
+              <a:t>   →   </a:t>
+            </a:r>
+            <a:r>
+              <a:rPr lang="zh-CN" sz="2200" b="0" i="0" u="none" strike="noStrike" cap="none">
+                <a:solidFill>
+                  <a:srgbClr val="111110"/>
                 </a:solidFill>
                 <a:latin typeface="Newsreader"/>
                 <a:ea typeface="Newsreader"/>
                 <a:cs typeface="Newsreader"/>
                 <a:sym typeface="Newsreader"/>
               </a:rPr>
-              <a:t>Dots</a:t>
-            </a:r>
-          </a:p>
-        </p:txBody>
-      </p:sp>
-      <p:sp>
-        <p:nvSpPr>
-          <p:cNvPr id="5013" name="SimReal 5013"/>
-          <p:cNvSpPr txBox="1"/>
-          <p:nvPr/>
-        </p:nvSpPr>
-        <p:spPr>
-          <a:xfrm>
-            <a:off x="3390138" y="2706624"/>
-            <a:ext cx="2567178" cy="457200"/>
-          </a:xfrm>
-          <a:prstGeom prst="rect">
-            <a:avLst/>
-          </a:prstGeom>
-          <a:noFill/>
-          <a:ln>
-            <a:noFill/>
-          </a:ln>
-        </p:spPr>
-        <p:txBody>
-          <a:bodyPr spcFirstLastPara="1" wrap="square" lIns="0" tIns="0" rIns="0" bIns="0" anchor="t" anchorCtr="0">
-            <a:noAutofit/>
-          </a:bodyPr>
-          <a:lstStyle/>
-          <a:p>
-            <a:pPr marL="0" marR="0" lvl="0" indent="0" algn="l" rtl="0">
-              <a:lnSpc>
-                <a:spcPct val="110000"/>
-              </a:lnSpc>
-              <a:spcBef>
-                <a:spcPts val="0"/>
-              </a:spcBef>
-              <a:spcAft>
-                <a:spcPts val="0"/>
-              </a:spcAft>
-              <a:buNone/>
-            </a:pPr>
-            <a:r>
-              <a:rPr lang="zh-CN" sz="1050" b="0" i="0" u="none" strike="noStrike" cap="none">
-                <a:solidFill>
-                  <a:srgbClr val="33322F"/>
-                </a:solidFill>
-                <a:latin typeface="Instrument Sans"/>
-                <a:ea typeface="Instrument Sans"/>
-                <a:cs typeface="Instrument Sans"/>
-                <a:sym typeface="Instrument Sans"/>
-              </a:rPr>
-              <a:t>发布常驻个人agent：</a:t>
-            </a:r>
-          </a:p>
-          <a:p>
-            <a:pPr marL="0" marR="0" lvl="0" indent="0" algn="l" rtl="0">
-              <a:lnSpc>
-                <a:spcPct val="110000"/>
-              </a:lnSpc>
-              <a:spcBef>
-                <a:spcPts val="0"/>
-              </a:spcBef>
-              <a:spcAft>
-                <a:spcPts val="0"/>
-              </a:spcAft>
-              <a:buNone/>
-            </a:pPr>
-            <a:r>
-              <a:rPr lang="zh-CN" sz="1050" b="0" i="0" u="none" strike="noStrike" cap="none">
-                <a:solidFill>
-                  <a:srgbClr val="33322F"/>
-                </a:solidFill>
-                <a:latin typeface="Instrument Sans"/>
-                <a:ea typeface="Instrument Sans"/>
-                <a:cs typeface="Instrument Sans"/>
-                <a:sym typeface="Instrument Sans"/>
-              </a:rPr>
-              <a:t>在后台持续替人做事</a:t>
-            </a:r>
-          </a:p>
-        </p:txBody>
-      </p:sp>
-      <p:sp>
-        <p:nvSpPr>
-          <p:cNvPr id="5014" name="SimReal 5014"/>
-          <p:cNvSpPr/>
-          <p:nvPr/>
-        </p:nvSpPr>
-        <p:spPr>
-          <a:xfrm>
-            <a:off x="6231636" y="1755648"/>
-            <a:ext cx="2567178" cy="18288"/>
-          </a:xfrm>
-          <a:prstGeom prst="rect">
-            <a:avLst/>
-          </a:prstGeom>
-          <a:solidFill>
-            <a:srgbClr val="111110"/>
-          </a:solidFill>
-          <a:ln>
-            <a:noFill/>
-          </a:ln>
-        </p:spPr>
-        <p:txBody>
-          <a:bodyPr/>
-          <a:lstStyle/>
-          <a:p>
-            <a:endParaRPr/>
-          </a:p>
-        </p:txBody>
-      </p:sp>
-      <p:sp>
-        <p:nvSpPr>
-          <p:cNvPr id="5015" name="SimReal 5015"/>
-          <p:cNvSpPr txBox="1"/>
-          <p:nvPr/>
-        </p:nvSpPr>
-        <p:spPr>
-          <a:xfrm>
-            <a:off x="6231636" y="1865376"/>
-            <a:ext cx="2567178" cy="201168"/>
-          </a:xfrm>
-          <a:prstGeom prst="rect">
-            <a:avLst/>
-          </a:prstGeom>
-          <a:noFill/>
-          <a:ln>
-            <a:noFill/>
-          </a:ln>
-        </p:spPr>
-        <p:txBody>
-          <a:bodyPr spcFirstLastPara="1" wrap="square" lIns="0" tIns="0" rIns="0" bIns="0" anchor="t" anchorCtr="0">
-            <a:noAutofit/>
-          </a:bodyPr>
-          <a:lstStyle/>
-          <a:p>
-            <a:pPr marL="0" marR="0" lvl="0" indent="0" algn="l" rtl="0">
-              <a:spcBef>
-                <a:spcPts val="0"/>
-              </a:spcBef>
-              <a:spcAft>
-                <a:spcPts val="0"/>
-              </a:spcAft>
-              <a:buNone/>
-            </a:pPr>
-            <a:r>
-              <a:rPr lang="zh-CN" sz="950" b="0" i="0" u="none" strike="noStrike" cap="none">
+              <a:t>真实结果结算</a:t>
+            </a:r>
+            <a:r>
+              <a:rPr lang="zh-CN" sz="1600" b="0" i="0" u="none" strike="noStrike" cap="none">
                 <a:solidFill>
                   <a:srgbClr val="6E6C66"/>
                 </a:solidFill>
-                <a:latin typeface="IBM Plex Mono"/>
-                <a:ea typeface="IBM Plex Mono"/>
-                <a:cs typeface="IBM Plex Mono"/>
-                <a:sym typeface="IBM Plex Mono"/>
-              </a:rPr>
-              <a:t>Instinct · 9月28日</a:t>
-            </a:r>
-          </a:p>
-        </p:txBody>
-      </p:sp>
-      <p:sp>
-        <p:nvSpPr>
-          <p:cNvPr id="5016" name="SimReal 5016"/>
-          <p:cNvSpPr txBox="1"/>
-          <p:nvPr/>
-        </p:nvSpPr>
-        <p:spPr>
-          <a:xfrm>
-            <a:off x="6231636" y="2084832"/>
-            <a:ext cx="2567178" cy="566928"/>
-          </a:xfrm>
-          <a:prstGeom prst="rect">
-            <a:avLst/>
-          </a:prstGeom>
-          <a:noFill/>
-          <a:ln>
-            <a:noFill/>
-          </a:ln>
-        </p:spPr>
-        <p:txBody>
-          <a:bodyPr spcFirstLastPara="1" wrap="square" lIns="0" tIns="0" rIns="0" bIns="0" anchor="t" anchorCtr="0">
-            <a:noAutofit/>
-          </a:bodyPr>
-          <a:lstStyle/>
-          <a:p>
-            <a:pPr marL="0" marR="0" lvl="0" indent="0" algn="l" rtl="0">
-              <a:spcBef>
-                <a:spcPts val="0"/>
-              </a:spcBef>
-              <a:spcAft>
-                <a:spcPts val="0"/>
-              </a:spcAft>
-              <a:buNone/>
-            </a:pPr>
-            <a:r>
-              <a:rPr lang="zh-CN" sz="3200" b="0" i="0" u="none" strike="noStrike" cap="none">
-                <a:solidFill>
-                  <a:srgbClr val="C2410C"/>
+                <a:latin typeface="Instrument Sans"/>
+                <a:ea typeface="Instrument Sans"/>
+                <a:cs typeface="Instrument Sans"/>
+                <a:sym typeface="Instrument Sans"/>
+              </a:rPr>
+              <a:t>   →   </a:t>
+            </a:r>
+            <a:r>
+              <a:rPr lang="zh-CN" sz="2200" b="0" i="0" u="none" strike="noStrike" cap="none">
+                <a:solidFill>
+                  <a:srgbClr val="111110"/>
                 </a:solidFill>
                 <a:latin typeface="Newsreader"/>
                 <a:ea typeface="Newsreader"/>
                 <a:cs typeface="Newsreader"/>
                 <a:sym typeface="Newsreader"/>
               </a:rPr>
-              <a:t>100亿美元</a:t>
-            </a:r>
-          </a:p>
-        </p:txBody>
-      </p:sp>
-      <p:sp>
-        <p:nvSpPr>
-          <p:cNvPr id="5017" name="SimReal 5017"/>
-          <p:cNvSpPr txBox="1"/>
-          <p:nvPr/>
-        </p:nvSpPr>
-        <p:spPr>
-          <a:xfrm>
-            <a:off x="6231636" y="2706624"/>
-            <a:ext cx="2567178" cy="457200"/>
-          </a:xfrm>
-          <a:prstGeom prst="rect">
-            <a:avLst/>
-          </a:prstGeom>
-          <a:noFill/>
-          <a:ln>
-            <a:noFill/>
-          </a:ln>
-        </p:spPr>
-        <p:txBody>
-          <a:bodyPr spcFirstLastPara="1" wrap="square" lIns="0" tIns="0" rIns="0" bIns="0" anchor="t" anchorCtr="0">
-            <a:noAutofit/>
-          </a:bodyPr>
-          <a:lstStyle/>
-          <a:p>
-            <a:pPr marL="0" marR="0" lvl="0" indent="0" algn="l" rtl="0">
-              <a:lnSpc>
-                <a:spcPct val="110000"/>
-              </a:lnSpc>
-              <a:spcBef>
-                <a:spcPts val="0"/>
-              </a:spcBef>
-              <a:spcAft>
-                <a:spcPts val="0"/>
-              </a:spcAft>
-              <a:buNone/>
-            </a:pPr>
-            <a:r>
-              <a:rPr lang="zh-CN" sz="1050" b="0" i="0" u="none" strike="noStrike" cap="none">
-                <a:solidFill>
-                  <a:srgbClr val="33322F"/>
-                </a:solidFill>
-                <a:latin typeface="Instrument Sans"/>
-                <a:ea typeface="Instrument Sans"/>
-                <a:cs typeface="Instrument Sans"/>
-                <a:sym typeface="Instrument Sans"/>
-              </a:rPr>
-              <a:t>33天估值从25亿升至100亿美元</a:t>
-            </a:r>
-          </a:p>
-          <a:p>
-            <a:pPr marL="0" marR="0" lvl="0" indent="0" algn="l" rtl="0">
-              <a:lnSpc>
-                <a:spcPct val="110000"/>
-              </a:lnSpc>
-              <a:spcBef>
-                <a:spcPts val="0"/>
-              </a:spcBef>
-              <a:spcAft>
-                <a:spcPts val="0"/>
-              </a:spcAft>
-              <a:buNone/>
-            </a:pPr>
-            <a:r>
-              <a:rPr lang="zh-CN" sz="1050" b="0" i="0" u="none" strike="noStrike" cap="none">
-                <a:solidFill>
-                  <a:srgbClr val="33322F"/>
-                </a:solidFill>
-                <a:latin typeface="Instrument Sans"/>
-                <a:ea typeface="Instrument Sans"/>
-                <a:cs typeface="Instrument Sans"/>
-                <a:sym typeface="Instrument Sans"/>
-              </a:rPr>
-              <a:t>红杉、Benchmark、Coatue投资</a:t>
-            </a:r>
-          </a:p>
-        </p:txBody>
-      </p:sp>
-      <p:sp>
-        <p:nvSpPr>
-          <p:cNvPr id="5018" name="SimReal 5018"/>
-          <p:cNvSpPr/>
-          <p:nvPr/>
-        </p:nvSpPr>
-        <p:spPr>
-          <a:xfrm>
-            <a:off x="9073134" y="1755648"/>
-            <a:ext cx="2567178" cy="18288"/>
-          </a:xfrm>
-          <a:prstGeom prst="rect">
-            <a:avLst/>
-          </a:prstGeom>
-          <a:solidFill>
-            <a:srgbClr val="111110"/>
-          </a:solidFill>
-          <a:ln>
-            <a:noFill/>
-          </a:ln>
-        </p:spPr>
-        <p:txBody>
-          <a:bodyPr/>
-          <a:lstStyle/>
-          <a:p>
-            <a:endParaRPr/>
-          </a:p>
-        </p:txBody>
-      </p:sp>
-      <p:sp>
-        <p:nvSpPr>
-          <p:cNvPr id="5019" name="SimReal 5019"/>
-          <p:cNvSpPr txBox="1"/>
-          <p:nvPr/>
-        </p:nvSpPr>
-        <p:spPr>
-          <a:xfrm>
-            <a:off x="9073134" y="1865376"/>
-            <a:ext cx="2567178" cy="201168"/>
-          </a:xfrm>
-          <a:prstGeom prst="rect">
-            <a:avLst/>
-          </a:prstGeom>
-          <a:noFill/>
-          <a:ln>
-            <a:noFill/>
-          </a:ln>
-        </p:spPr>
-        <p:txBody>
-          <a:bodyPr spcFirstLastPara="1" wrap="square" lIns="0" tIns="0" rIns="0" bIns="0" anchor="t" anchorCtr="0">
-            <a:noAutofit/>
-          </a:bodyPr>
-          <a:lstStyle/>
-          <a:p>
-            <a:pPr marL="0" marR="0" lvl="0" indent="0" algn="l" rtl="0">
-              <a:spcBef>
-                <a:spcPts val="0"/>
-              </a:spcBef>
-              <a:spcAft>
-                <a:spcPts val="0"/>
-              </a:spcAft>
-              <a:buNone/>
-            </a:pPr>
-            <a:r>
-              <a:rPr lang="zh-CN" sz="950" b="0" i="0" u="none" strike="noStrike" cap="none">
+              <a:t>agent变强</a:t>
+            </a:r>
+            <a:r>
+              <a:rPr lang="zh-CN" sz="1600" b="0" i="0" u="none" strike="noStrike" cap="none">
                 <a:solidFill>
                   <a:srgbClr val="6E6C66"/>
                 </a:solidFill>
-                <a:latin typeface="IBM Plex Mono"/>
-                <a:ea typeface="IBM Plex Mono"/>
-                <a:cs typeface="IBM Plex Mono"/>
-                <a:sym typeface="IBM Plex Mono"/>
-              </a:rPr>
-              <a:t>但还做不好</a:t>
-            </a:r>
-          </a:p>
-        </p:txBody>
-      </p:sp>
-      <p:sp>
-        <p:nvSpPr>
-          <p:cNvPr id="5020" name="SimReal 5020"/>
-          <p:cNvSpPr txBox="1"/>
-          <p:nvPr/>
-        </p:nvSpPr>
-        <p:spPr>
-          <a:xfrm>
-            <a:off x="9073134" y="2084832"/>
-            <a:ext cx="2567178" cy="566928"/>
-          </a:xfrm>
-          <a:prstGeom prst="rect">
-            <a:avLst/>
-          </a:prstGeom>
-          <a:noFill/>
-          <a:ln>
-            <a:noFill/>
-          </a:ln>
-        </p:spPr>
-        <p:txBody>
-          <a:bodyPr spcFirstLastPara="1" wrap="square" lIns="0" tIns="0" rIns="0" bIns="0" anchor="t" anchorCtr="0">
-            <a:noAutofit/>
-          </a:bodyPr>
-          <a:lstStyle/>
-          <a:p>
-            <a:pPr marL="0" marR="0" lvl="0" indent="0" algn="l" rtl="0">
-              <a:spcBef>
-                <a:spcPts val="0"/>
-              </a:spcBef>
-              <a:spcAft>
-                <a:spcPts val="0"/>
-              </a:spcAft>
-              <a:buNone/>
-            </a:pPr>
-            <a:r>
-              <a:rPr lang="zh-CN" sz="3200" b="0" i="0" u="none" strike="noStrike" cap="none">
+                <a:latin typeface="Instrument Sans"/>
+                <a:ea typeface="Instrument Sans"/>
+                <a:cs typeface="Instrument Sans"/>
+                <a:sym typeface="Instrument Sans"/>
+              </a:rPr>
+              <a:t>   →   </a:t>
+            </a:r>
+            <a:r>
+              <a:rPr lang="zh-CN" sz="2200" b="0" i="0" u="none" strike="noStrike" cap="none">
                 <a:solidFill>
                   <a:srgbClr val="C2410C"/>
                 </a:solidFill>
@@ -31767,7 +31764,56 @@
                 <a:cs typeface="Newsreader"/>
                 <a:sym typeface="Newsreader"/>
               </a:rPr>
-              <a:t>16.1%</a:t>
+              <a:t>数据交给实验室</a:t>
+            </a:r>
+          </a:p>
+        </p:txBody>
+      </p:sp>
+      <p:sp>
+        <p:nvSpPr>
+          <p:cNvPr id="5020" name="SimReal 5020"/>
+          <p:cNvSpPr txBox="1"/>
+          <p:nvPr/>
+        </p:nvSpPr>
+        <p:spPr>
+          <a:xfrm>
+            <a:off x="548640" y="4297680"/>
+            <a:ext cx="11091672" cy="274320"/>
+          </a:xfrm>
+          <a:prstGeom prst="rect">
+            <a:avLst/>
+          </a:prstGeom>
+          <a:noFill/>
+          <a:ln>
+            <a:noFill/>
+          </a:ln>
+        </p:spPr>
+        <p:txBody>
+          <a:bodyPr spcFirstLastPara="1" wrap="square" lIns="0" tIns="0" rIns="0" bIns="0" anchor="t" anchorCtr="0">
+            <a:noAutofit/>
+          </a:bodyPr>
+          <a:lstStyle/>
+          <a:p>
+            <a:pPr marL="0" marR="0" lvl="0" indent="0" algn="l" rtl="0">
+              <a:spcBef>
+                <a:spcPts val="0"/>
+              </a:spcBef>
+              <a:spcAft>
+                <a:spcPts val="0"/>
+              </a:spcAft>
+              <a:buNone/>
+            </a:pPr>
+            <a:r>
+              <a:rPr lang="zh-CN" sz="1200" b="0" i="0" u="none" strike="noStrike" cap="none">
+                <a:solidFill>
+                  <a:srgbClr val="6E6C66"/>
+                </a:solidFill>
+                <a:latin typeface="Instrument Sans"/>
+                <a:ea typeface="Instrument Sans"/>
+                <a:cs typeface="Instrument Sans"/>
+                <a:sym typeface="Instrument Sans"/>
+              </a:rPr>
+              <a:t>交易世界已跑通这个循环：Qwen3.8-27B最高提升12%。本轮向个人agent开放交易与事件预测。</a:t>
             </a:r>
           </a:p>
         </p:txBody>
@@ -31780,86 +31826,8 @@
         </p:nvSpPr>
         <p:spPr>
           <a:xfrm>
-            <a:off x="9073134" y="2706624"/>
-            <a:ext cx="2567178" cy="457200"/>
-          </a:xfrm>
-          <a:prstGeom prst="rect">
-            <a:avLst/>
-          </a:prstGeom>
-          <a:noFill/>
-          <a:ln>
-            <a:noFill/>
-          </a:ln>
-        </p:spPr>
-        <p:txBody>
-          <a:bodyPr spcFirstLastPara="1" wrap="square" lIns="0" tIns="0" rIns="0" bIns="0" anchor="t" anchorCtr="0">
-            <a:noAutofit/>
-          </a:bodyPr>
-          <a:lstStyle/>
-          <a:p>
-            <a:pPr marL="0" marR="0" lvl="0" indent="0" algn="l" rtl="0">
-              <a:lnSpc>
-                <a:spcPct val="110000"/>
-              </a:lnSpc>
-              <a:spcBef>
-                <a:spcPts val="0"/>
-              </a:spcBef>
-              <a:spcAft>
-                <a:spcPts val="0"/>
-              </a:spcAft>
-              <a:buNone/>
-            </a:pPr>
-            <a:r>
-              <a:rPr lang="zh-CN" sz="1050" b="0" i="0" u="none" strike="noStrike" cap="none">
-                <a:solidFill>
-                  <a:srgbClr val="33322F"/>
-                </a:solidFill>
-                <a:latin typeface="Instrument Sans"/>
-                <a:ea typeface="Instrument Sans"/>
-                <a:cs typeface="Instrument Sans"/>
-                <a:sym typeface="Instrument Sans"/>
-              </a:rPr>
-              <a:t>最强模型只完成16.1%的</a:t>
-            </a:r>
-          </a:p>
-          <a:p>
-            <a:pPr marL="0" marR="0" lvl="0" indent="0" algn="l" rtl="0">
-              <a:lnSpc>
-                <a:spcPct val="110000"/>
-              </a:lnSpc>
-              <a:spcBef>
-                <a:spcPts val="0"/>
-              </a:spcBef>
-              <a:spcAft>
-                <a:spcPts val="0"/>
-              </a:spcAft>
-              <a:buNone/>
-            </a:pPr>
-            <a:r>
-              <a:rPr lang="zh-CN" sz="1050" b="0" i="0" u="none" strike="noStrike" cap="none">
-                <a:solidFill>
-                  <a:srgbClr val="33322F"/>
-                </a:solidFill>
-                <a:latin typeface="Instrument Sans"/>
-                <a:ea typeface="Instrument Sans"/>
-                <a:cs typeface="Instrument Sans"/>
-                <a:sym typeface="Instrument Sans"/>
-              </a:rPr>
-              <a:t>真实外包项目（Remote Labor Index）</a:t>
-            </a:r>
-          </a:p>
-        </p:txBody>
-      </p:sp>
-      <p:sp>
-        <p:nvSpPr>
-          <p:cNvPr id="5022" name="SimReal 5022"/>
-          <p:cNvSpPr txBox="1"/>
-          <p:nvPr/>
-        </p:nvSpPr>
-        <p:spPr>
-          <a:xfrm>
-            <a:off x="548640" y="3255264"/>
-            <a:ext cx="7498080" cy="329184"/>
+            <a:off x="548640" y="5120640"/>
+            <a:ext cx="11091672" cy="420624"/>
           </a:xfrm>
           <a:prstGeom prst="rect">
             <a:avLst/>
@@ -31885,7 +31853,7 @@
               <a:buNone/>
             </a:pPr>
             <a:r>
-              <a:rPr lang="zh-CN" sz="1600" b="0" i="0" u="none" strike="noStrike" cap="none">
+              <a:rPr lang="zh-CN" sz="2400" b="0" i="0" u="none" strike="noStrike" cap="none">
                 <a:solidFill>
                   <a:srgbClr val="111110"/>
                 </a:solidFill>
@@ -31894,10 +31862,10 @@
                 <a:cs typeface="Newsreader"/>
                 <a:sym typeface="Newsreader"/>
               </a:rPr>
-              <a:t>让这个循环持续转动的，是</a:t>
-            </a:r>
-            <a:r>
-              <a:rPr lang="zh-CN" sz="1600" b="0" i="0" u="none" strike="noStrike" cap="none">
+              <a:t>沙盒让agent不闯祸，</a:t>
+            </a:r>
+            <a:r>
+              <a:rPr lang="zh-CN" sz="2400" b="0" i="0" u="none" strike="noStrike" cap="none">
                 <a:solidFill>
                   <a:srgbClr val="C2410C"/>
                 </a:solidFill>
@@ -31906,174 +31874,10 @@
                 <a:cs typeface="Newsreader"/>
                 <a:sym typeface="Newsreader"/>
               </a:rPr>
-              <a:t>个人agent</a:t>
-            </a:r>
-          </a:p>
-        </p:txBody>
-      </p:sp>
-      <p:sp>
-        <p:nvSpPr>
-          <p:cNvPr id="5023" name="SimReal 5023"/>
-          <p:cNvSpPr txBox="1"/>
-          <p:nvPr/>
-        </p:nvSpPr>
-        <p:spPr>
-          <a:xfrm>
-            <a:off x="8046720" y="3255264"/>
-            <a:ext cx="3593592" cy="329184"/>
-          </a:xfrm>
-          <a:prstGeom prst="rect">
-            <a:avLst/>
-          </a:prstGeom>
-          <a:noFill/>
-          <a:ln>
-            <a:noFill/>
-          </a:ln>
-        </p:spPr>
-        <p:txBody>
-          <a:bodyPr spcFirstLastPara="1" wrap="square" lIns="0" tIns="0" rIns="0" bIns="0" anchor="ctr" anchorCtr="0">
-            <a:noAutofit/>
-          </a:bodyPr>
-          <a:lstStyle/>
-          <a:p>
-            <a:pPr marL="0" marR="0" lvl="0" indent="0" algn="r" rtl="0">
-              <a:spcBef>
-                <a:spcPts val="0"/>
-              </a:spcBef>
-              <a:spcAft>
-                <a:spcPts val="0"/>
-              </a:spcAft>
-              <a:buNone/>
-            </a:pPr>
-            <a:r>
-              <a:rPr lang="zh-CN" sz="900" b="0" i="0" u="none" strike="noStrike" cap="none">
-                <a:solidFill>
-                  <a:srgbClr val="6E6C66"/>
-                </a:solidFill>
-                <a:latin typeface="Instrument Sans"/>
-                <a:ea typeface="Instrument Sans"/>
-                <a:cs typeface="Instrument Sans"/>
-                <a:sym typeface="Instrument Sans"/>
-              </a:rPr>
-              <a:t>深色：Xitadel已跑通  ·  浅色：本轮计划</a:t>
-            </a:r>
-          </a:p>
-        </p:txBody>
-      </p:sp>
-      <p:sp>
-        <p:nvSpPr>
-          <p:cNvPr id="5024" name="SimReal 5024"/>
-          <p:cNvSpPr/>
-          <p:nvPr/>
-        </p:nvSpPr>
-        <p:spPr>
-          <a:xfrm>
-            <a:off x="548640" y="3639312"/>
-            <a:ext cx="1998878" cy="1097280"/>
-          </a:xfrm>
-          <a:prstGeom prst="rect">
-            <a:avLst/>
-          </a:prstGeom>
-          <a:solidFill>
-            <a:srgbClr val="F2F1EC"/>
-          </a:solidFill>
-          <a:ln>
-            <a:noFill/>
-          </a:ln>
-        </p:spPr>
-        <p:txBody>
-          <a:bodyPr/>
-          <a:lstStyle/>
-          <a:p>
-            <a:endParaRPr/>
-          </a:p>
-        </p:txBody>
-      </p:sp>
-      <p:sp>
-        <p:nvSpPr>
-          <p:cNvPr id="5025" name="SimReal 5025"/>
-          <p:cNvSpPr txBox="1"/>
-          <p:nvPr/>
-        </p:nvSpPr>
-        <p:spPr>
-          <a:xfrm>
-            <a:off x="713232" y="3749040"/>
-            <a:ext cx="1724558" cy="182880"/>
-          </a:xfrm>
-          <a:prstGeom prst="rect">
-            <a:avLst/>
-          </a:prstGeom>
-          <a:noFill/>
-          <a:ln>
-            <a:noFill/>
-          </a:ln>
-        </p:spPr>
-        <p:txBody>
-          <a:bodyPr spcFirstLastPara="1" wrap="square" lIns="0" tIns="0" rIns="0" bIns="0" anchor="t" anchorCtr="0">
-            <a:noAutofit/>
-          </a:bodyPr>
-          <a:lstStyle/>
-          <a:p>
-            <a:pPr marL="0" marR="0" lvl="0" indent="0" algn="l" rtl="0">
-              <a:spcBef>
-                <a:spcPts val="0"/>
-              </a:spcBef>
-              <a:spcAft>
-                <a:spcPts val="0"/>
-              </a:spcAft>
-              <a:buNone/>
-            </a:pPr>
-            <a:r>
-              <a:rPr lang="zh-CN" sz="900" b="0" i="0" u="none" strike="noStrike" cap="none">
-                <a:solidFill>
-                  <a:srgbClr val="C2410C"/>
-                </a:solidFill>
-                <a:latin typeface="IBM Plex Mono"/>
-                <a:ea typeface="IBM Plex Mono"/>
-                <a:cs typeface="IBM Plex Mono"/>
-                <a:sym typeface="IBM Plex Mono"/>
-              </a:rPr>
-              <a:t>本轮计划</a:t>
-            </a:r>
-          </a:p>
-        </p:txBody>
-      </p:sp>
-      <p:sp>
-        <p:nvSpPr>
-          <p:cNvPr id="5026" name="SimReal 5026"/>
-          <p:cNvSpPr txBox="1"/>
-          <p:nvPr/>
-        </p:nvSpPr>
-        <p:spPr>
-          <a:xfrm>
-            <a:off x="713232" y="3968496"/>
-            <a:ext cx="1724558" cy="310896"/>
-          </a:xfrm>
-          <a:prstGeom prst="rect">
-            <a:avLst/>
-          </a:prstGeom>
-          <a:noFill/>
-          <a:ln>
-            <a:noFill/>
-          </a:ln>
-        </p:spPr>
-        <p:txBody>
-          <a:bodyPr spcFirstLastPara="1" wrap="square" lIns="0" tIns="0" rIns="0" bIns="0" anchor="t" anchorCtr="0">
-            <a:noAutofit/>
-          </a:bodyPr>
-          <a:lstStyle/>
-          <a:p>
-            <a:pPr marL="0" marR="0" lvl="0" indent="0" algn="l" rtl="0">
-              <a:spcBef>
-                <a:spcPts val="0"/>
-              </a:spcBef>
-              <a:spcAft>
-                <a:spcPts val="0"/>
-              </a:spcAft>
-              <a:buNone/>
-            </a:pPr>
-            <a:r>
-              <a:rPr lang="zh-CN" sz="1500" b="0" i="0" u="none" strike="noStrike" cap="none">
+              <a:t>我们让它做对</a:t>
+            </a:r>
+            <a:r>
+              <a:rPr lang="zh-CN" sz="2400" b="0" i="0" u="none" strike="noStrike" cap="none">
                 <a:solidFill>
                   <a:srgbClr val="111110"/>
                 </a:solidFill>
@@ -32082,1370 +31886,6 @@
                 <a:cs typeface="Newsreader"/>
                 <a:sym typeface="Newsreader"/>
               </a:rPr>
-              <a:t>进场练习</a:t>
-            </a:r>
-          </a:p>
-        </p:txBody>
-      </p:sp>
-      <p:sp>
-        <p:nvSpPr>
-          <p:cNvPr id="5027" name="SimReal 5027"/>
-          <p:cNvSpPr txBox="1"/>
-          <p:nvPr/>
-        </p:nvSpPr>
-        <p:spPr>
-          <a:xfrm>
-            <a:off x="713232" y="4315968"/>
-            <a:ext cx="1724558" cy="365760"/>
-          </a:xfrm>
-          <a:prstGeom prst="rect">
-            <a:avLst/>
-          </a:prstGeom>
-          <a:noFill/>
-          <a:ln>
-            <a:noFill/>
-          </a:ln>
-        </p:spPr>
-        <p:txBody>
-          <a:bodyPr spcFirstLastPara="1" wrap="square" lIns="0" tIns="0" rIns="0" bIns="0" anchor="t" anchorCtr="0">
-            <a:noAutofit/>
-          </a:bodyPr>
-          <a:lstStyle/>
-          <a:p>
-            <a:pPr marL="0" marR="0" lvl="0" indent="0" algn="l" rtl="0">
-              <a:lnSpc>
-                <a:spcPct val="110000"/>
-              </a:lnSpc>
-              <a:spcBef>
-                <a:spcPts val="0"/>
-              </a:spcBef>
-              <a:spcAft>
-                <a:spcPts val="0"/>
-              </a:spcAft>
-              <a:buNone/>
-            </a:pPr>
-            <a:r>
-              <a:rPr lang="zh-CN" sz="1000" b="0" i="0" u="none" strike="noStrike" cap="none">
-                <a:solidFill>
-                  <a:srgbClr val="33322F"/>
-                </a:solidFill>
-                <a:latin typeface="Instrument Sans"/>
-                <a:ea typeface="Instrument Sans"/>
-                <a:cs typeface="Instrument Sans"/>
-                <a:sym typeface="Instrument Sans"/>
-              </a:rPr>
-              <a:t>交易与事件预测先开放</a:t>
-            </a:r>
-          </a:p>
-          <a:p>
-            <a:pPr marL="0" marR="0" lvl="0" indent="0" algn="l" rtl="0">
-              <a:lnSpc>
-                <a:spcPct val="110000"/>
-              </a:lnSpc>
-              <a:spcBef>
-                <a:spcPts val="0"/>
-              </a:spcBef>
-              <a:spcAft>
-                <a:spcPts val="0"/>
-              </a:spcAft>
-              <a:buNone/>
-            </a:pPr>
-            <a:r>
-              <a:rPr lang="zh-CN" sz="1000" b="0" i="0" u="none" strike="noStrike" cap="none">
-                <a:solidFill>
-                  <a:srgbClr val="33322F"/>
-                </a:solidFill>
-                <a:latin typeface="Instrument Sans"/>
-                <a:ea typeface="Instrument Sans"/>
-                <a:cs typeface="Instrument Sans"/>
-                <a:sym typeface="Instrument Sans"/>
-              </a:rPr>
-              <a:t>留出集不开放</a:t>
-            </a:r>
-          </a:p>
-        </p:txBody>
-      </p:sp>
-      <p:sp>
-        <p:nvSpPr>
-          <p:cNvPr id="5028" name="SimReal 5028"/>
-          <p:cNvSpPr txBox="1"/>
-          <p:nvPr/>
-        </p:nvSpPr>
-        <p:spPr>
-          <a:xfrm>
-            <a:off x="2547518" y="3639312"/>
-            <a:ext cx="274320" cy="1097280"/>
-          </a:xfrm>
-          <a:prstGeom prst="rect">
-            <a:avLst/>
-          </a:prstGeom>
-          <a:noFill/>
-          <a:ln>
-            <a:noFill/>
-          </a:ln>
-        </p:spPr>
-        <p:txBody>
-          <a:bodyPr spcFirstLastPara="1" wrap="square" lIns="0" tIns="0" rIns="0" bIns="0" anchor="ctr" anchorCtr="0">
-            <a:noAutofit/>
-          </a:bodyPr>
-          <a:lstStyle/>
-          <a:p>
-            <a:pPr marL="0" marR="0" lvl="0" indent="0" algn="ctr" rtl="0">
-              <a:spcBef>
-                <a:spcPts val="0"/>
-              </a:spcBef>
-              <a:spcAft>
-                <a:spcPts val="0"/>
-              </a:spcAft>
-              <a:buNone/>
-            </a:pPr>
-            <a:r>
-              <a:rPr lang="zh-CN" sz="1200" b="0" i="0" u="none" strike="noStrike" cap="none">
-                <a:solidFill>
-                  <a:srgbClr val="6E6C66"/>
-                </a:solidFill>
-                <a:latin typeface="Instrument Sans"/>
-                <a:ea typeface="Instrument Sans"/>
-                <a:cs typeface="Instrument Sans"/>
-                <a:sym typeface="Instrument Sans"/>
-              </a:rPr>
-              <a:t>→</a:t>
-            </a:r>
-          </a:p>
-        </p:txBody>
-      </p:sp>
-      <p:sp>
-        <p:nvSpPr>
-          <p:cNvPr id="5029" name="SimReal 5029"/>
-          <p:cNvSpPr/>
-          <p:nvPr/>
-        </p:nvSpPr>
-        <p:spPr>
-          <a:xfrm>
-            <a:off x="2821838" y="3639312"/>
-            <a:ext cx="1998878" cy="1097280"/>
-          </a:xfrm>
-          <a:prstGeom prst="rect">
-            <a:avLst/>
-          </a:prstGeom>
-          <a:solidFill>
-            <a:srgbClr val="111110"/>
-          </a:solidFill>
-          <a:ln>
-            <a:noFill/>
-          </a:ln>
-        </p:spPr>
-        <p:txBody>
-          <a:bodyPr/>
-          <a:lstStyle/>
-          <a:p>
-            <a:endParaRPr/>
-          </a:p>
-        </p:txBody>
-      </p:sp>
-      <p:sp>
-        <p:nvSpPr>
-          <p:cNvPr id="5030" name="SimReal 5030"/>
-          <p:cNvSpPr txBox="1"/>
-          <p:nvPr/>
-        </p:nvSpPr>
-        <p:spPr>
-          <a:xfrm>
-            <a:off x="2986430" y="3749040"/>
-            <a:ext cx="1724558" cy="182880"/>
-          </a:xfrm>
-          <a:prstGeom prst="rect">
-            <a:avLst/>
-          </a:prstGeom>
-          <a:noFill/>
-          <a:ln>
-            <a:noFill/>
-          </a:ln>
-        </p:spPr>
-        <p:txBody>
-          <a:bodyPr spcFirstLastPara="1" wrap="square" lIns="0" tIns="0" rIns="0" bIns="0" anchor="t" anchorCtr="0">
-            <a:noAutofit/>
-          </a:bodyPr>
-          <a:lstStyle/>
-          <a:p>
-            <a:pPr marL="0" marR="0" lvl="0" indent="0" algn="l" rtl="0">
-              <a:spcBef>
-                <a:spcPts val="0"/>
-              </a:spcBef>
-              <a:spcAft>
-                <a:spcPts val="0"/>
-              </a:spcAft>
-              <a:buNone/>
-            </a:pPr>
-            <a:r>
-              <a:rPr lang="zh-CN" sz="900" b="0" i="0" u="none" strike="noStrike" cap="none">
-                <a:solidFill>
-                  <a:srgbClr val="E27A3F"/>
-                </a:solidFill>
-                <a:latin typeface="IBM Plex Mono"/>
-                <a:ea typeface="IBM Plex Mono"/>
-                <a:cs typeface="IBM Plex Mono"/>
-                <a:sym typeface="IBM Plex Mono"/>
-              </a:rPr>
-              <a:t>已跑通</a:t>
-            </a:r>
-          </a:p>
-        </p:txBody>
-      </p:sp>
-      <p:sp>
-        <p:nvSpPr>
-          <p:cNvPr id="5031" name="SimReal 5031"/>
-          <p:cNvSpPr txBox="1"/>
-          <p:nvPr/>
-        </p:nvSpPr>
-        <p:spPr>
-          <a:xfrm>
-            <a:off x="2986430" y="3968496"/>
-            <a:ext cx="1724558" cy="310896"/>
-          </a:xfrm>
-          <a:prstGeom prst="rect">
-            <a:avLst/>
-          </a:prstGeom>
-          <a:noFill/>
-          <a:ln>
-            <a:noFill/>
-          </a:ln>
-        </p:spPr>
-        <p:txBody>
-          <a:bodyPr spcFirstLastPara="1" wrap="square" lIns="0" tIns="0" rIns="0" bIns="0" anchor="t" anchorCtr="0">
-            <a:noAutofit/>
-          </a:bodyPr>
-          <a:lstStyle/>
-          <a:p>
-            <a:pPr marL="0" marR="0" lvl="0" indent="0" algn="l" rtl="0">
-              <a:spcBef>
-                <a:spcPts val="0"/>
-              </a:spcBef>
-              <a:spcAft>
-                <a:spcPts val="0"/>
-              </a:spcAft>
-              <a:buNone/>
-            </a:pPr>
-            <a:r>
-              <a:rPr lang="zh-CN" sz="1500" b="0" i="0" u="none" strike="noStrike" cap="none">
-                <a:solidFill>
-                  <a:srgbClr val="FAF9F6"/>
-                </a:solidFill>
-                <a:latin typeface="Newsreader"/>
-                <a:ea typeface="Newsreader"/>
-                <a:cs typeface="Newsreader"/>
-                <a:sym typeface="Newsreader"/>
-              </a:rPr>
-              <a:t>真实结果结算</a:t>
-            </a:r>
-          </a:p>
-        </p:txBody>
-      </p:sp>
-      <p:sp>
-        <p:nvSpPr>
-          <p:cNvPr id="5032" name="SimReal 5032"/>
-          <p:cNvSpPr txBox="1"/>
-          <p:nvPr/>
-        </p:nvSpPr>
-        <p:spPr>
-          <a:xfrm>
-            <a:off x="2986430" y="4315968"/>
-            <a:ext cx="1724558" cy="365760"/>
-          </a:xfrm>
-          <a:prstGeom prst="rect">
-            <a:avLst/>
-          </a:prstGeom>
-          <a:noFill/>
-          <a:ln>
-            <a:noFill/>
-          </a:ln>
-        </p:spPr>
-        <p:txBody>
-          <a:bodyPr spcFirstLastPara="1" wrap="square" lIns="0" tIns="0" rIns="0" bIns="0" anchor="t" anchorCtr="0">
-            <a:noAutofit/>
-          </a:bodyPr>
-          <a:lstStyle/>
-          <a:p>
-            <a:pPr marL="0" marR="0" lvl="0" indent="0" algn="l" rtl="0">
-              <a:lnSpc>
-                <a:spcPct val="110000"/>
-              </a:lnSpc>
-              <a:spcBef>
-                <a:spcPts val="0"/>
-              </a:spcBef>
-              <a:spcAft>
-                <a:spcPts val="0"/>
-              </a:spcAft>
-              <a:buNone/>
-            </a:pPr>
-            <a:r>
-              <a:rPr lang="zh-CN" sz="1000" b="0" i="0" u="none" strike="noStrike" cap="none">
-                <a:solidFill>
-                  <a:srgbClr val="C4C0B7"/>
-                </a:solidFill>
-                <a:latin typeface="Instrument Sans"/>
-                <a:ea typeface="Instrument Sans"/>
-                <a:cs typeface="Instrument Sans"/>
-                <a:sym typeface="Instrument Sans"/>
-              </a:rPr>
-              <a:t>市场结算每笔交易</a:t>
-            </a:r>
-          </a:p>
-          <a:p>
-            <a:pPr marL="0" marR="0" lvl="0" indent="0" algn="l" rtl="0">
-              <a:lnSpc>
-                <a:spcPct val="110000"/>
-              </a:lnSpc>
-              <a:spcBef>
-                <a:spcPts val="0"/>
-              </a:spcBef>
-              <a:spcAft>
-                <a:spcPts val="0"/>
-              </a:spcAft>
-              <a:buNone/>
-            </a:pPr>
-            <a:r>
-              <a:rPr lang="zh-CN" sz="1000" b="0" i="0" u="none" strike="noStrike" cap="none">
-                <a:solidFill>
-                  <a:srgbClr val="C4C0B7"/>
-                </a:solidFill>
-                <a:latin typeface="Instrument Sans"/>
-                <a:ea typeface="Instrument Sans"/>
-                <a:cs typeface="Instrument Sans"/>
-                <a:sym typeface="Instrument Sans"/>
-              </a:rPr>
-              <a:t>每次运行留下Agent轨迹</a:t>
-            </a:r>
-          </a:p>
-        </p:txBody>
-      </p:sp>
-      <p:sp>
-        <p:nvSpPr>
-          <p:cNvPr id="5033" name="SimReal 5033"/>
-          <p:cNvSpPr txBox="1"/>
-          <p:nvPr/>
-        </p:nvSpPr>
-        <p:spPr>
-          <a:xfrm>
-            <a:off x="4820717" y="3639312"/>
-            <a:ext cx="274320" cy="1097280"/>
-          </a:xfrm>
-          <a:prstGeom prst="rect">
-            <a:avLst/>
-          </a:prstGeom>
-          <a:noFill/>
-          <a:ln>
-            <a:noFill/>
-          </a:ln>
-        </p:spPr>
-        <p:txBody>
-          <a:bodyPr spcFirstLastPara="1" wrap="square" lIns="0" tIns="0" rIns="0" bIns="0" anchor="ctr" anchorCtr="0">
-            <a:noAutofit/>
-          </a:bodyPr>
-          <a:lstStyle/>
-          <a:p>
-            <a:pPr marL="0" marR="0" lvl="0" indent="0" algn="ctr" rtl="0">
-              <a:spcBef>
-                <a:spcPts val="0"/>
-              </a:spcBef>
-              <a:spcAft>
-                <a:spcPts val="0"/>
-              </a:spcAft>
-              <a:buNone/>
-            </a:pPr>
-            <a:r>
-              <a:rPr lang="zh-CN" sz="1200" b="0" i="0" u="none" strike="noStrike" cap="none">
-                <a:solidFill>
-                  <a:srgbClr val="6E6C66"/>
-                </a:solidFill>
-                <a:latin typeface="Instrument Sans"/>
-                <a:ea typeface="Instrument Sans"/>
-                <a:cs typeface="Instrument Sans"/>
-                <a:sym typeface="Instrument Sans"/>
-              </a:rPr>
-              <a:t>→</a:t>
-            </a:r>
-          </a:p>
-        </p:txBody>
-      </p:sp>
-      <p:sp>
-        <p:nvSpPr>
-          <p:cNvPr id="5034" name="SimReal 5034"/>
-          <p:cNvSpPr/>
-          <p:nvPr/>
-        </p:nvSpPr>
-        <p:spPr>
-          <a:xfrm>
-            <a:off x="5095037" y="3639312"/>
-            <a:ext cx="1998878" cy="1097280"/>
-          </a:xfrm>
-          <a:prstGeom prst="rect">
-            <a:avLst/>
-          </a:prstGeom>
-          <a:solidFill>
-            <a:srgbClr val="111110"/>
-          </a:solidFill>
-          <a:ln>
-            <a:noFill/>
-          </a:ln>
-        </p:spPr>
-        <p:txBody>
-          <a:bodyPr/>
-          <a:lstStyle/>
-          <a:p>
-            <a:endParaRPr/>
-          </a:p>
-        </p:txBody>
-      </p:sp>
-      <p:sp>
-        <p:nvSpPr>
-          <p:cNvPr id="5035" name="SimReal 5035"/>
-          <p:cNvSpPr txBox="1"/>
-          <p:nvPr/>
-        </p:nvSpPr>
-        <p:spPr>
-          <a:xfrm>
-            <a:off x="5259629" y="3749040"/>
-            <a:ext cx="1724558" cy="182880"/>
-          </a:xfrm>
-          <a:prstGeom prst="rect">
-            <a:avLst/>
-          </a:prstGeom>
-          <a:noFill/>
-          <a:ln>
-            <a:noFill/>
-          </a:ln>
-        </p:spPr>
-        <p:txBody>
-          <a:bodyPr spcFirstLastPara="1" wrap="square" lIns="0" tIns="0" rIns="0" bIns="0" anchor="t" anchorCtr="0">
-            <a:noAutofit/>
-          </a:bodyPr>
-          <a:lstStyle/>
-          <a:p>
-            <a:pPr marL="0" marR="0" lvl="0" indent="0" algn="l" rtl="0">
-              <a:spcBef>
-                <a:spcPts val="0"/>
-              </a:spcBef>
-              <a:spcAft>
-                <a:spcPts val="0"/>
-              </a:spcAft>
-              <a:buNone/>
-            </a:pPr>
-            <a:r>
-              <a:rPr lang="zh-CN" sz="900" b="0" i="0" u="none" strike="noStrike" cap="none">
-                <a:solidFill>
-                  <a:srgbClr val="E27A3F"/>
-                </a:solidFill>
-                <a:latin typeface="IBM Plex Mono"/>
-                <a:ea typeface="IBM Plex Mono"/>
-                <a:cs typeface="IBM Plex Mono"/>
-                <a:sym typeface="IBM Plex Mono"/>
-              </a:rPr>
-              <a:t>已跑通</a:t>
-            </a:r>
-          </a:p>
-        </p:txBody>
-      </p:sp>
-      <p:sp>
-        <p:nvSpPr>
-          <p:cNvPr id="5036" name="SimReal 5036"/>
-          <p:cNvSpPr txBox="1"/>
-          <p:nvPr/>
-        </p:nvSpPr>
-        <p:spPr>
-          <a:xfrm>
-            <a:off x="5259629" y="3968496"/>
-            <a:ext cx="1724558" cy="310896"/>
-          </a:xfrm>
-          <a:prstGeom prst="rect">
-            <a:avLst/>
-          </a:prstGeom>
-          <a:noFill/>
-          <a:ln>
-            <a:noFill/>
-          </a:ln>
-        </p:spPr>
-        <p:txBody>
-          <a:bodyPr spcFirstLastPara="1" wrap="square" lIns="0" tIns="0" rIns="0" bIns="0" anchor="t" anchorCtr="0">
-            <a:noAutofit/>
-          </a:bodyPr>
-          <a:lstStyle/>
-          <a:p>
-            <a:pPr marL="0" marR="0" lvl="0" indent="0" algn="l" rtl="0">
-              <a:spcBef>
-                <a:spcPts val="0"/>
-              </a:spcBef>
-              <a:spcAft>
-                <a:spcPts val="0"/>
-              </a:spcAft>
-              <a:buNone/>
-            </a:pPr>
-            <a:r>
-              <a:rPr lang="zh-CN" sz="1500" b="0" i="0" u="none" strike="noStrike" cap="none">
-                <a:solidFill>
-                  <a:srgbClr val="FAF9F6"/>
-                </a:solidFill>
-                <a:latin typeface="Newsreader"/>
-                <a:ea typeface="Newsreader"/>
-                <a:cs typeface="Newsreader"/>
-                <a:sym typeface="Newsreader"/>
-              </a:rPr>
-              <a:t>agent变强</a:t>
-            </a:r>
-          </a:p>
-        </p:txBody>
-      </p:sp>
-      <p:sp>
-        <p:nvSpPr>
-          <p:cNvPr id="5037" name="SimReal 5037"/>
-          <p:cNvSpPr txBox="1"/>
-          <p:nvPr/>
-        </p:nvSpPr>
-        <p:spPr>
-          <a:xfrm>
-            <a:off x="5259629" y="4315968"/>
-            <a:ext cx="1724558" cy="365760"/>
-          </a:xfrm>
-          <a:prstGeom prst="rect">
-            <a:avLst/>
-          </a:prstGeom>
-          <a:noFill/>
-          <a:ln>
-            <a:noFill/>
-          </a:ln>
-        </p:spPr>
-        <p:txBody>
-          <a:bodyPr spcFirstLastPara="1" wrap="square" lIns="0" tIns="0" rIns="0" bIns="0" anchor="t" anchorCtr="0">
-            <a:noAutofit/>
-          </a:bodyPr>
-          <a:lstStyle/>
-          <a:p>
-            <a:pPr marL="0" marR="0" lvl="0" indent="0" algn="l" rtl="0">
-              <a:lnSpc>
-                <a:spcPct val="110000"/>
-              </a:lnSpc>
-              <a:spcBef>
-                <a:spcPts val="0"/>
-              </a:spcBef>
-              <a:spcAft>
-                <a:spcPts val="0"/>
-              </a:spcAft>
-              <a:buNone/>
-            </a:pPr>
-            <a:r>
-              <a:rPr lang="zh-CN" sz="1000" b="0" i="0" u="none" strike="noStrike" cap="none">
-                <a:solidFill>
-                  <a:srgbClr val="C4C0B7"/>
-                </a:solidFill>
-                <a:latin typeface="Instrument Sans"/>
-                <a:ea typeface="Instrument Sans"/>
-                <a:cs typeface="Instrument Sans"/>
-                <a:sym typeface="Instrument Sans"/>
-              </a:rPr>
-              <a:t>Qwen3.8-27B训练后，</a:t>
-            </a:r>
-          </a:p>
-          <a:p>
-            <a:pPr marL="0" marR="0" lvl="0" indent="0" algn="l" rtl="0">
-              <a:lnSpc>
-                <a:spcPct val="110000"/>
-              </a:lnSpc>
-              <a:spcBef>
-                <a:spcPts val="0"/>
-              </a:spcBef>
-              <a:spcAft>
-                <a:spcPts val="0"/>
-              </a:spcAft>
-              <a:buNone/>
-            </a:pPr>
-            <a:r>
-              <a:rPr lang="zh-CN" sz="1000" b="0" i="0" u="none" strike="noStrike" cap="none">
-                <a:solidFill>
-                  <a:srgbClr val="C4C0B7"/>
-                </a:solidFill>
-                <a:latin typeface="Instrument Sans"/>
-                <a:ea typeface="Instrument Sans"/>
-                <a:cs typeface="Instrument Sans"/>
-                <a:sym typeface="Instrument Sans"/>
-              </a:rPr>
-              <a:t>交易表现最高提升12%</a:t>
-            </a:r>
-          </a:p>
-        </p:txBody>
-      </p:sp>
-      <p:sp>
-        <p:nvSpPr>
-          <p:cNvPr id="5038" name="SimReal 5038"/>
-          <p:cNvSpPr txBox="1"/>
-          <p:nvPr/>
-        </p:nvSpPr>
-        <p:spPr>
-          <a:xfrm>
-            <a:off x="7093915" y="3639312"/>
-            <a:ext cx="274320" cy="1097280"/>
-          </a:xfrm>
-          <a:prstGeom prst="rect">
-            <a:avLst/>
-          </a:prstGeom>
-          <a:noFill/>
-          <a:ln>
-            <a:noFill/>
-          </a:ln>
-        </p:spPr>
-        <p:txBody>
-          <a:bodyPr spcFirstLastPara="1" wrap="square" lIns="0" tIns="0" rIns="0" bIns="0" anchor="ctr" anchorCtr="0">
-            <a:noAutofit/>
-          </a:bodyPr>
-          <a:lstStyle/>
-          <a:p>
-            <a:pPr marL="0" marR="0" lvl="0" indent="0" algn="ctr" rtl="0">
-              <a:spcBef>
-                <a:spcPts val="0"/>
-              </a:spcBef>
-              <a:spcAft>
-                <a:spcPts val="0"/>
-              </a:spcAft>
-              <a:buNone/>
-            </a:pPr>
-            <a:r>
-              <a:rPr lang="zh-CN" sz="1200" b="0" i="0" u="none" strike="noStrike" cap="none">
-                <a:solidFill>
-                  <a:srgbClr val="6E6C66"/>
-                </a:solidFill>
-                <a:latin typeface="Instrument Sans"/>
-                <a:ea typeface="Instrument Sans"/>
-                <a:cs typeface="Instrument Sans"/>
-                <a:sym typeface="Instrument Sans"/>
-              </a:rPr>
-              <a:t>→</a:t>
-            </a:r>
-          </a:p>
-        </p:txBody>
-      </p:sp>
-      <p:sp>
-        <p:nvSpPr>
-          <p:cNvPr id="5039" name="SimReal 5039"/>
-          <p:cNvSpPr/>
-          <p:nvPr/>
-        </p:nvSpPr>
-        <p:spPr>
-          <a:xfrm>
-            <a:off x="7368235" y="3639312"/>
-            <a:ext cx="1998878" cy="1097280"/>
-          </a:xfrm>
-          <a:prstGeom prst="rect">
-            <a:avLst/>
-          </a:prstGeom>
-          <a:solidFill>
-            <a:srgbClr val="F2F1EC"/>
-          </a:solidFill>
-          <a:ln>
-            <a:noFill/>
-          </a:ln>
-        </p:spPr>
-        <p:txBody>
-          <a:bodyPr/>
-          <a:lstStyle/>
-          <a:p>
-            <a:endParaRPr/>
-          </a:p>
-        </p:txBody>
-      </p:sp>
-      <p:sp>
-        <p:nvSpPr>
-          <p:cNvPr id="5040" name="SimReal 5040"/>
-          <p:cNvSpPr txBox="1"/>
-          <p:nvPr/>
-        </p:nvSpPr>
-        <p:spPr>
-          <a:xfrm>
-            <a:off x="7532827" y="3749040"/>
-            <a:ext cx="1724558" cy="182880"/>
-          </a:xfrm>
-          <a:prstGeom prst="rect">
-            <a:avLst/>
-          </a:prstGeom>
-          <a:noFill/>
-          <a:ln>
-            <a:noFill/>
-          </a:ln>
-        </p:spPr>
-        <p:txBody>
-          <a:bodyPr spcFirstLastPara="1" wrap="square" lIns="0" tIns="0" rIns="0" bIns="0" anchor="t" anchorCtr="0">
-            <a:noAutofit/>
-          </a:bodyPr>
-          <a:lstStyle/>
-          <a:p>
-            <a:pPr marL="0" marR="0" lvl="0" indent="0" algn="l" rtl="0">
-              <a:spcBef>
-                <a:spcPts val="0"/>
-              </a:spcBef>
-              <a:spcAft>
-                <a:spcPts val="0"/>
-              </a:spcAft>
-              <a:buNone/>
-            </a:pPr>
-            <a:r>
-              <a:rPr lang="zh-CN" sz="900" b="0" i="0" u="none" strike="noStrike" cap="none">
-                <a:solidFill>
-                  <a:srgbClr val="C2410C"/>
-                </a:solidFill>
-                <a:latin typeface="IBM Plex Mono"/>
-                <a:ea typeface="IBM Plex Mono"/>
-                <a:cs typeface="IBM Plex Mono"/>
-                <a:sym typeface="IBM Plex Mono"/>
-              </a:rPr>
-              <a:t>本轮计划</a:t>
-            </a:r>
-          </a:p>
-        </p:txBody>
-      </p:sp>
-      <p:sp>
-        <p:nvSpPr>
-          <p:cNvPr id="5041" name="SimReal 5041"/>
-          <p:cNvSpPr txBox="1"/>
-          <p:nvPr/>
-        </p:nvSpPr>
-        <p:spPr>
-          <a:xfrm>
-            <a:off x="7532827" y="3968496"/>
-            <a:ext cx="1724558" cy="310896"/>
-          </a:xfrm>
-          <a:prstGeom prst="rect">
-            <a:avLst/>
-          </a:prstGeom>
-          <a:noFill/>
-          <a:ln>
-            <a:noFill/>
-          </a:ln>
-        </p:spPr>
-        <p:txBody>
-          <a:bodyPr spcFirstLastPara="1" wrap="square" lIns="0" tIns="0" rIns="0" bIns="0" anchor="t" anchorCtr="0">
-            <a:noAutofit/>
-          </a:bodyPr>
-          <a:lstStyle/>
-          <a:p>
-            <a:pPr marL="0" marR="0" lvl="0" indent="0" algn="l" rtl="0">
-              <a:spcBef>
-                <a:spcPts val="0"/>
-              </a:spcBef>
-              <a:spcAft>
-                <a:spcPts val="0"/>
-              </a:spcAft>
-              <a:buNone/>
-            </a:pPr>
-            <a:r>
-              <a:rPr lang="zh-CN" sz="1500" b="0" i="0" u="none" strike="noStrike" cap="none">
-                <a:solidFill>
-                  <a:srgbClr val="111110"/>
-                </a:solidFill>
-                <a:latin typeface="Newsreader"/>
-                <a:ea typeface="Newsreader"/>
-                <a:cs typeface="Newsreader"/>
-                <a:sym typeface="Newsreader"/>
-              </a:rPr>
-              <a:t>世界更真实</a:t>
-            </a:r>
-          </a:p>
-        </p:txBody>
-      </p:sp>
-      <p:sp>
-        <p:nvSpPr>
-          <p:cNvPr id="5042" name="SimReal 5042"/>
-          <p:cNvSpPr txBox="1"/>
-          <p:nvPr/>
-        </p:nvSpPr>
-        <p:spPr>
-          <a:xfrm>
-            <a:off x="7532827" y="4315968"/>
-            <a:ext cx="1724558" cy="365760"/>
-          </a:xfrm>
-          <a:prstGeom prst="rect">
-            <a:avLst/>
-          </a:prstGeom>
-          <a:noFill/>
-          <a:ln>
-            <a:noFill/>
-          </a:ln>
-        </p:spPr>
-        <p:txBody>
-          <a:bodyPr spcFirstLastPara="1" wrap="square" lIns="0" tIns="0" rIns="0" bIns="0" anchor="t" anchorCtr="0">
-            <a:noAutofit/>
-          </a:bodyPr>
-          <a:lstStyle/>
-          <a:p>
-            <a:pPr marL="0" marR="0" lvl="0" indent="0" algn="l" rtl="0">
-              <a:lnSpc>
-                <a:spcPct val="110000"/>
-              </a:lnSpc>
-              <a:spcBef>
-                <a:spcPts val="0"/>
-              </a:spcBef>
-              <a:spcAft>
-                <a:spcPts val="0"/>
-              </a:spcAft>
-              <a:buNone/>
-            </a:pPr>
-            <a:r>
-              <a:rPr lang="zh-CN" sz="1000" b="0" i="0" u="none" strike="noStrike" cap="none">
-                <a:solidFill>
-                  <a:srgbClr val="33322F"/>
-                </a:solidFill>
-                <a:latin typeface="Instrument Sans"/>
-                <a:ea typeface="Instrument Sans"/>
-                <a:cs typeface="Instrument Sans"/>
-                <a:sym typeface="Instrument Sans"/>
-              </a:rPr>
-              <a:t>agent钻过的漏洞被补上，</a:t>
-            </a:r>
-          </a:p>
-          <a:p>
-            <a:pPr marL="0" marR="0" lvl="0" indent="0" algn="l" rtl="0">
-              <a:lnSpc>
-                <a:spcPct val="110000"/>
-              </a:lnSpc>
-              <a:spcBef>
-                <a:spcPts val="0"/>
-              </a:spcBef>
-              <a:spcAft>
-                <a:spcPts val="0"/>
-              </a:spcAft>
-              <a:buNone/>
-            </a:pPr>
-            <a:r>
-              <a:rPr lang="zh-CN" sz="1000" b="0" i="0" u="none" strike="noStrike" cap="none">
-                <a:solidFill>
-                  <a:srgbClr val="33322F"/>
-                </a:solidFill>
-                <a:latin typeface="Instrument Sans"/>
-                <a:ea typeface="Instrument Sans"/>
-                <a:cs typeface="Instrument Sans"/>
-                <a:sym typeface="Instrument Sans"/>
-              </a:rPr>
-              <a:t>失败变成新任务与验证器</a:t>
-            </a:r>
-          </a:p>
-        </p:txBody>
-      </p:sp>
-      <p:sp>
-        <p:nvSpPr>
-          <p:cNvPr id="5043" name="SimReal 5043"/>
-          <p:cNvSpPr txBox="1"/>
-          <p:nvPr/>
-        </p:nvSpPr>
-        <p:spPr>
-          <a:xfrm>
-            <a:off x="9367114" y="3639312"/>
-            <a:ext cx="274320" cy="1097280"/>
-          </a:xfrm>
-          <a:prstGeom prst="rect">
-            <a:avLst/>
-          </a:prstGeom>
-          <a:noFill/>
-          <a:ln>
-            <a:noFill/>
-          </a:ln>
-        </p:spPr>
-        <p:txBody>
-          <a:bodyPr spcFirstLastPara="1" wrap="square" lIns="0" tIns="0" rIns="0" bIns="0" anchor="ctr" anchorCtr="0">
-            <a:noAutofit/>
-          </a:bodyPr>
-          <a:lstStyle/>
-          <a:p>
-            <a:pPr marL="0" marR="0" lvl="0" indent="0" algn="ctr" rtl="0">
-              <a:spcBef>
-                <a:spcPts val="0"/>
-              </a:spcBef>
-              <a:spcAft>
-                <a:spcPts val="0"/>
-              </a:spcAft>
-              <a:buNone/>
-            </a:pPr>
-            <a:r>
-              <a:rPr lang="zh-CN" sz="1200" b="0" i="0" u="none" strike="noStrike" cap="none">
-                <a:solidFill>
-                  <a:srgbClr val="6E6C66"/>
-                </a:solidFill>
-                <a:latin typeface="Instrument Sans"/>
-                <a:ea typeface="Instrument Sans"/>
-                <a:cs typeface="Instrument Sans"/>
-                <a:sym typeface="Instrument Sans"/>
-              </a:rPr>
-              <a:t>→</a:t>
-            </a:r>
-          </a:p>
-        </p:txBody>
-      </p:sp>
-      <p:sp>
-        <p:nvSpPr>
-          <p:cNvPr id="5044" name="SimReal 5044"/>
-          <p:cNvSpPr/>
-          <p:nvPr/>
-        </p:nvSpPr>
-        <p:spPr>
-          <a:xfrm>
-            <a:off x="9641434" y="3639312"/>
-            <a:ext cx="1998878" cy="1097280"/>
-          </a:xfrm>
-          <a:prstGeom prst="rect">
-            <a:avLst/>
-          </a:prstGeom>
-          <a:solidFill>
-            <a:srgbClr val="F2F1EC"/>
-          </a:solidFill>
-          <a:ln>
-            <a:noFill/>
-          </a:ln>
-        </p:spPr>
-        <p:txBody>
-          <a:bodyPr/>
-          <a:lstStyle/>
-          <a:p>
-            <a:endParaRPr/>
-          </a:p>
-        </p:txBody>
-      </p:sp>
-      <p:sp>
-        <p:nvSpPr>
-          <p:cNvPr id="5045" name="SimReal 5045"/>
-          <p:cNvSpPr txBox="1"/>
-          <p:nvPr/>
-        </p:nvSpPr>
-        <p:spPr>
-          <a:xfrm>
-            <a:off x="9806026" y="3749040"/>
-            <a:ext cx="1724558" cy="182880"/>
-          </a:xfrm>
-          <a:prstGeom prst="rect">
-            <a:avLst/>
-          </a:prstGeom>
-          <a:noFill/>
-          <a:ln>
-            <a:noFill/>
-          </a:ln>
-        </p:spPr>
-        <p:txBody>
-          <a:bodyPr spcFirstLastPara="1" wrap="square" lIns="0" tIns="0" rIns="0" bIns="0" anchor="t" anchorCtr="0">
-            <a:noAutofit/>
-          </a:bodyPr>
-          <a:lstStyle/>
-          <a:p>
-            <a:pPr marL="0" marR="0" lvl="0" indent="0" algn="l" rtl="0">
-              <a:spcBef>
-                <a:spcPts val="0"/>
-              </a:spcBef>
-              <a:spcAft>
-                <a:spcPts val="0"/>
-              </a:spcAft>
-              <a:buNone/>
-            </a:pPr>
-            <a:r>
-              <a:rPr lang="zh-CN" sz="900" b="0" i="0" u="none" strike="noStrike" cap="none">
-                <a:solidFill>
-                  <a:srgbClr val="C2410C"/>
-                </a:solidFill>
-                <a:latin typeface="IBM Plex Mono"/>
-                <a:ea typeface="IBM Plex Mono"/>
-                <a:cs typeface="IBM Plex Mono"/>
-                <a:sym typeface="IBM Plex Mono"/>
-              </a:rPr>
-              <a:t>本轮计划</a:t>
-            </a:r>
-          </a:p>
-        </p:txBody>
-      </p:sp>
-      <p:sp>
-        <p:nvSpPr>
-          <p:cNvPr id="5046" name="SimReal 5046"/>
-          <p:cNvSpPr txBox="1"/>
-          <p:nvPr/>
-        </p:nvSpPr>
-        <p:spPr>
-          <a:xfrm>
-            <a:off x="9806026" y="3968496"/>
-            <a:ext cx="1724558" cy="310896"/>
-          </a:xfrm>
-          <a:prstGeom prst="rect">
-            <a:avLst/>
-          </a:prstGeom>
-          <a:noFill/>
-          <a:ln>
-            <a:noFill/>
-          </a:ln>
-        </p:spPr>
-        <p:txBody>
-          <a:bodyPr spcFirstLastPara="1" wrap="square" lIns="0" tIns="0" rIns="0" bIns="0" anchor="t" anchorCtr="0">
-            <a:noAutofit/>
-          </a:bodyPr>
-          <a:lstStyle/>
-          <a:p>
-            <a:pPr marL="0" marR="0" lvl="0" indent="0" algn="l" rtl="0">
-              <a:spcBef>
-                <a:spcPts val="0"/>
-              </a:spcBef>
-              <a:spcAft>
-                <a:spcPts val="0"/>
-              </a:spcAft>
-              <a:buNone/>
-            </a:pPr>
-            <a:r>
-              <a:rPr lang="zh-CN" sz="1500" b="0" i="0" u="none" strike="noStrike" cap="none">
-                <a:solidFill>
-                  <a:srgbClr val="111110"/>
-                </a:solidFill>
-                <a:latin typeface="Newsreader"/>
-                <a:ea typeface="Newsreader"/>
-                <a:cs typeface="Newsreader"/>
-                <a:sym typeface="Newsreader"/>
-              </a:rPr>
-              <a:t>数据交给实验室</a:t>
-            </a:r>
-          </a:p>
-        </p:txBody>
-      </p:sp>
-      <p:sp>
-        <p:nvSpPr>
-          <p:cNvPr id="5047" name="SimReal 5047"/>
-          <p:cNvSpPr txBox="1"/>
-          <p:nvPr/>
-        </p:nvSpPr>
-        <p:spPr>
-          <a:xfrm>
-            <a:off x="9806026" y="4315968"/>
-            <a:ext cx="1724558" cy="365760"/>
-          </a:xfrm>
-          <a:prstGeom prst="rect">
-            <a:avLst/>
-          </a:prstGeom>
-          <a:noFill/>
-          <a:ln>
-            <a:noFill/>
-          </a:ln>
-        </p:spPr>
-        <p:txBody>
-          <a:bodyPr spcFirstLastPara="1" wrap="square" lIns="0" tIns="0" rIns="0" bIns="0" anchor="t" anchorCtr="0">
-            <a:noAutofit/>
-          </a:bodyPr>
-          <a:lstStyle/>
-          <a:p>
-            <a:pPr marL="0" marR="0" lvl="0" indent="0" algn="l" rtl="0">
-              <a:lnSpc>
-                <a:spcPct val="110000"/>
-              </a:lnSpc>
-              <a:spcBef>
-                <a:spcPts val="0"/>
-              </a:spcBef>
-              <a:spcAft>
-                <a:spcPts val="0"/>
-              </a:spcAft>
-              <a:buNone/>
-            </a:pPr>
-            <a:r>
-              <a:rPr lang="zh-CN" sz="1000" b="0" i="0" u="none" strike="noStrike" cap="none">
-                <a:solidFill>
-                  <a:srgbClr val="33322F"/>
-                </a:solidFill>
-                <a:latin typeface="Instrument Sans"/>
-                <a:ea typeface="Instrument Sans"/>
-                <a:cs typeface="Instrument Sans"/>
-                <a:sym typeface="Instrument Sans"/>
-              </a:rPr>
-              <a:t>训练更强的模型，</a:t>
-            </a:r>
-          </a:p>
-          <a:p>
-            <a:pPr marL="0" marR="0" lvl="0" indent="0" algn="l" rtl="0">
-              <a:lnSpc>
-                <a:spcPct val="110000"/>
-              </a:lnSpc>
-              <a:spcBef>
-                <a:spcPts val="0"/>
-              </a:spcBef>
-              <a:spcAft>
-                <a:spcPts val="0"/>
-              </a:spcAft>
-              <a:buNone/>
-            </a:pPr>
-            <a:r>
-              <a:rPr lang="zh-CN" sz="1000" b="0" i="0" u="none" strike="noStrike" cap="none">
-                <a:solidFill>
-                  <a:srgbClr val="33322F"/>
-                </a:solidFill>
-                <a:latin typeface="Instrument Sans"/>
-                <a:ea typeface="Instrument Sans"/>
-                <a:cs typeface="Instrument Sans"/>
-                <a:sym typeface="Instrument Sans"/>
-              </a:rPr>
-              <a:t>带来更多个人agent</a:t>
-            </a:r>
-          </a:p>
-        </p:txBody>
-      </p:sp>
-      <p:sp>
-        <p:nvSpPr>
-          <p:cNvPr id="5048" name="SimReal 5048"/>
-          <p:cNvSpPr/>
-          <p:nvPr/>
-        </p:nvSpPr>
-        <p:spPr>
-          <a:xfrm>
-            <a:off x="10640873" y="4736592"/>
-            <a:ext cx="10973" cy="182880"/>
-          </a:xfrm>
-          <a:prstGeom prst="rect">
-            <a:avLst/>
-          </a:prstGeom>
-          <a:solidFill>
-            <a:srgbClr val="C4C0B7"/>
-          </a:solidFill>
-          <a:ln>
-            <a:noFill/>
-          </a:ln>
-        </p:spPr>
-        <p:txBody>
-          <a:bodyPr/>
-          <a:lstStyle/>
-          <a:p>
-            <a:endParaRPr/>
-          </a:p>
-        </p:txBody>
-      </p:sp>
-      <p:sp>
-        <p:nvSpPr>
-          <p:cNvPr id="5049" name="SimReal 5049"/>
-          <p:cNvSpPr/>
-          <p:nvPr/>
-        </p:nvSpPr>
-        <p:spPr>
-          <a:xfrm>
-            <a:off x="1548079" y="4919472"/>
-            <a:ext cx="9103766" cy="10973"/>
-          </a:xfrm>
-          <a:prstGeom prst="rect">
-            <a:avLst/>
-          </a:prstGeom>
-          <a:solidFill>
-            <a:srgbClr val="C4C0B7"/>
-          </a:solidFill>
-          <a:ln>
-            <a:noFill/>
-          </a:ln>
-        </p:spPr>
-        <p:txBody>
-          <a:bodyPr/>
-          <a:lstStyle/>
-          <a:p>
-            <a:endParaRPr/>
-          </a:p>
-        </p:txBody>
-      </p:sp>
-      <p:sp>
-        <p:nvSpPr>
-          <p:cNvPr id="5050" name="SimReal 5050"/>
-          <p:cNvSpPr/>
-          <p:nvPr/>
-        </p:nvSpPr>
-        <p:spPr>
-          <a:xfrm>
-            <a:off x="1548079" y="4828032"/>
-            <a:ext cx="10973" cy="100584"/>
-          </a:xfrm>
-          <a:prstGeom prst="rect">
-            <a:avLst/>
-          </a:prstGeom>
-          <a:solidFill>
-            <a:srgbClr val="C4C0B7"/>
-          </a:solidFill>
-          <a:ln>
-            <a:noFill/>
-          </a:ln>
-        </p:spPr>
-        <p:txBody>
-          <a:bodyPr/>
-          <a:lstStyle/>
-          <a:p>
-            <a:endParaRPr/>
-          </a:p>
-        </p:txBody>
-      </p:sp>
-      <p:sp>
-        <p:nvSpPr>
-          <p:cNvPr id="5051" name="SimReal 5051"/>
-          <p:cNvSpPr txBox="1"/>
-          <p:nvPr/>
-        </p:nvSpPr>
-        <p:spPr>
-          <a:xfrm>
-            <a:off x="1365199" y="4718304"/>
-            <a:ext cx="376733" cy="146304"/>
-          </a:xfrm>
-          <a:prstGeom prst="rect">
-            <a:avLst/>
-          </a:prstGeom>
-          <a:noFill/>
-          <a:ln>
-            <a:noFill/>
-          </a:ln>
-        </p:spPr>
-        <p:txBody>
-          <a:bodyPr spcFirstLastPara="1" wrap="square" lIns="0" tIns="0" rIns="0" bIns="0" anchor="ctr" anchorCtr="0">
-            <a:noAutofit/>
-          </a:bodyPr>
-          <a:lstStyle/>
-          <a:p>
-            <a:pPr marL="0" marR="0" lvl="0" indent="0" algn="ctr" rtl="0">
-              <a:spcBef>
-                <a:spcPts val="0"/>
-              </a:spcBef>
-              <a:spcAft>
-                <a:spcPts val="0"/>
-              </a:spcAft>
-              <a:buNone/>
-            </a:pPr>
-            <a:r>
-              <a:rPr lang="zh-CN" sz="900" b="0" i="0" u="none" strike="noStrike" cap="none">
-                <a:solidFill>
-                  <a:srgbClr val="6E6C66"/>
-                </a:solidFill>
-                <a:latin typeface="Instrument Sans"/>
-                <a:ea typeface="Instrument Sans"/>
-                <a:cs typeface="Instrument Sans"/>
-                <a:sym typeface="Instrument Sans"/>
-              </a:rPr>
-              <a:t>↑</a:t>
-            </a:r>
-          </a:p>
-        </p:txBody>
-      </p:sp>
-      <p:sp>
-        <p:nvSpPr>
-          <p:cNvPr id="5052" name="SimReal 5052"/>
-          <p:cNvSpPr txBox="1"/>
-          <p:nvPr/>
-        </p:nvSpPr>
-        <p:spPr>
-          <a:xfrm>
-            <a:off x="548640" y="5065776"/>
-            <a:ext cx="11091672" cy="329184"/>
-          </a:xfrm>
-          <a:prstGeom prst="rect">
-            <a:avLst/>
-          </a:prstGeom>
-          <a:noFill/>
-          <a:ln>
-            <a:noFill/>
-          </a:ln>
-        </p:spPr>
-        <p:txBody>
-          <a:bodyPr spcFirstLastPara="1" wrap="square" lIns="0" tIns="0" rIns="0" bIns="0" anchor="ctr" anchorCtr="0">
-            <a:noAutofit/>
-          </a:bodyPr>
-          <a:lstStyle/>
-          <a:p>
-            <a:pPr marL="0" marR="0" lvl="0" indent="0" algn="l" rtl="0">
-              <a:spcBef>
-                <a:spcPts val="0"/>
-              </a:spcBef>
-              <a:spcAft>
-                <a:spcPts val="0"/>
-              </a:spcAft>
-              <a:buNone/>
-            </a:pPr>
-            <a:r>
-              <a:rPr lang="zh-CN" sz="1000" b="1" i="0" u="none" strike="noStrike" cap="none">
-                <a:solidFill>
-                  <a:srgbClr val="C2410C"/>
-                </a:solidFill>
-                <a:latin typeface="IBM Plex Mono"/>
-                <a:ea typeface="IBM Plex Mono"/>
-                <a:cs typeface="IBM Plex Mono"/>
-                <a:sym typeface="IBM Plex Mono"/>
-              </a:rPr>
-              <a:t>数据规则   </a:t>
-            </a:r>
-            <a:r>
-              <a:rPr lang="zh-CN" sz="1150" b="0" i="0" u="none" strike="noStrike" cap="none">
-                <a:solidFill>
-                  <a:srgbClr val="111110"/>
-                </a:solidFill>
-                <a:latin typeface="Instrument Sans"/>
-                <a:ea typeface="Instrument Sans"/>
-                <a:cs typeface="Instrument Sans"/>
-                <a:sym typeface="Instrument Sans"/>
-              </a:rPr>
-              <a:t>怎么用由合作方决定：可以保密、付费练习，也可以脱敏共享轨迹，换取练习额度和收益分成；交给实验室的每条数据都带授权记录</a:t>
-            </a:r>
-          </a:p>
-        </p:txBody>
-      </p:sp>
-      <p:sp>
-        <p:nvSpPr>
-          <p:cNvPr id="5053" name="SimReal 5053"/>
-          <p:cNvSpPr txBox="1"/>
-          <p:nvPr/>
-        </p:nvSpPr>
-        <p:spPr>
-          <a:xfrm>
-            <a:off x="548640" y="5468112"/>
-            <a:ext cx="11091672" cy="420624"/>
-          </a:xfrm>
-          <a:prstGeom prst="rect">
-            <a:avLst/>
-          </a:prstGeom>
-          <a:noFill/>
-          <a:ln>
-            <a:noFill/>
-          </a:ln>
-        </p:spPr>
-        <p:txBody>
-          <a:bodyPr spcFirstLastPara="1" wrap="square" lIns="0" tIns="0" rIns="0" bIns="0" anchor="ctr" anchorCtr="0">
-            <a:noAutofit/>
-          </a:bodyPr>
-          <a:lstStyle/>
-          <a:p>
-            <a:pPr marL="0" marR="0" lvl="0" indent="0" algn="l" rtl="0">
-              <a:spcBef>
-                <a:spcPts val="0"/>
-              </a:spcBef>
-              <a:spcAft>
-                <a:spcPts val="0"/>
-              </a:spcAft>
-              <a:buNone/>
-            </a:pPr>
-            <a:r>
-              <a:rPr lang="zh-CN" sz="2000" b="0" i="0" u="none" strike="noStrike" cap="none">
-                <a:solidFill>
-                  <a:srgbClr val="111110"/>
-                </a:solidFill>
-                <a:latin typeface="Newsreader"/>
-                <a:ea typeface="Newsreader"/>
-                <a:cs typeface="Newsreader"/>
-                <a:sym typeface="Newsreader"/>
-              </a:rPr>
-              <a:t>沙盒让agent不闯祸，</a:t>
-            </a:r>
-            <a:r>
-              <a:rPr lang="zh-CN" sz="2000" b="0" i="0" u="none" strike="noStrike" cap="none">
-                <a:solidFill>
-                  <a:srgbClr val="C2410C"/>
-                </a:solidFill>
-                <a:latin typeface="Newsreader"/>
-                <a:ea typeface="Newsreader"/>
-                <a:cs typeface="Newsreader"/>
-                <a:sym typeface="Newsreader"/>
-              </a:rPr>
-              <a:t>我们让它做对</a:t>
-            </a:r>
-            <a:r>
-              <a:rPr lang="zh-CN" sz="2000" b="0" i="0" u="none" strike="noStrike" cap="none">
-                <a:solidFill>
-                  <a:srgbClr val="111110"/>
-                </a:solidFill>
-                <a:latin typeface="Newsreader"/>
-                <a:ea typeface="Newsreader"/>
-                <a:cs typeface="Newsreader"/>
-                <a:sym typeface="Newsreader"/>
-              </a:rPr>
               <a:t>。</a:t>
             </a:r>
           </a:p>
@@ -33453,7 +31893,7 @@
       </p:sp>
       <p:sp>
         <p:nvSpPr>
-          <p:cNvPr id="5054" name="SimReal 5054"/>
+          <p:cNvPr id="5022" name="SimReal 5022"/>
           <p:cNvSpPr txBox="1"/>
           <p:nvPr/>
         </p:nvSpPr>
@@ -33495,14 +31935,14 @@
                 <a:cs typeface="Instrument Sans"/>
                 <a:sym typeface="Instrument Sans"/>
               </a:rPr>
-              <a:t>来源：Meta与OpenAI发布（2026年9月8日、29日）；彭博（2026年9月21日）；Instinct公告（2026年9月28日）；Remote Labor Index（Scale AI与CAIS，2026年7月）。详见A2。</a:t>
-            </a:r>
-          </a:p>
-        </p:txBody>
-      </p:sp>
-      <p:sp>
-        <p:nvSpPr>
-          <p:cNvPr id="5055" name="SimReal 5055"/>
+              <a:t>来源：Meta与OpenAI发布（2026年9月8日、29日）；Instinct公告（2026年9月28日）；Remote Labor Index（Scale AI与CAIS，2026年7月）。详见A2。</a:t>
+            </a:r>
+          </a:p>
+        </p:txBody>
+      </p:sp>
+      <p:sp>
+        <p:nvSpPr>
+          <p:cNvPr id="5023" name="SimReal 5023"/>
           <p:cNvSpPr txBox="1"/>
           <p:nvPr/>
         </p:nvSpPr>
@@ -33551,7 +31991,7 @@
       </p:sp>
       <p:sp>
         <p:nvSpPr>
-          <p:cNvPr id="5056" name="SimReal 5056"/>
+          <p:cNvPr id="5024" name="SimReal 5024"/>
           <p:cNvSpPr txBox="1"/>
           <p:nvPr/>
         </p:nvSpPr>
@@ -33600,7 +32040,7 @@
       </p:sp>
       <p:sp>
         <p:nvSpPr>
-          <p:cNvPr id="5057" name="SimReal 5057"/>
+          <p:cNvPr id="5025" name="SimReal 5025"/>
           <p:cNvSpPr txBox="1"/>
           <p:nvPr/>
         </p:nvSpPr>

--- a/SimReal-BP-v29.pptx
+++ b/SimReal-BP-v29.pptx
@@ -5992,7 +5992,7 @@
         </p:nvSpPr>
         <p:spPr>
           <a:xfrm>
-            <a:off x="548640" y="1554480"/>
+            <a:off x="548640" y="1234440"/>
             <a:ext cx="7498080" cy="1737360"/>
           </a:xfrm>
           <a:prstGeom prst="rect">
@@ -6070,7 +6070,56 @@
         </p:nvSpPr>
         <p:spPr>
           <a:xfrm>
-            <a:off x="548640" y="3520440"/>
+            <a:off x="548640" y="3127248"/>
+            <a:ext cx="7863840" cy="420624"/>
+          </a:xfrm>
+          <a:prstGeom prst="rect">
+            <a:avLst/>
+          </a:prstGeom>
+          <a:noFill/>
+          <a:ln>
+            <a:noFill/>
+          </a:ln>
+        </p:spPr>
+        <p:txBody>
+          <a:bodyPr spcFirstLastPara="1" wrap="square" lIns="0" tIns="0" rIns="0" bIns="0" anchor="t" anchorCtr="0">
+            <a:noAutofit/>
+          </a:bodyPr>
+          <a:lstStyle/>
+          <a:p>
+            <a:pPr marL="0" marR="0" lvl="0" indent="0" algn="l" rtl="0">
+              <a:spcBef>
+                <a:spcPts val="0"/>
+              </a:spcBef>
+              <a:spcAft>
+                <a:spcPts val="0"/>
+              </a:spcAft>
+              <a:buNone/>
+            </a:pPr>
+            <a:r>
+              <a:rPr lang="zh-CN" sz="2200" b="0" i="0" u="none" strike="noStrike" cap="none">
+                <a:solidFill>
+                  <a:srgbClr val="111110"/>
+                </a:solidFill>
+                <a:latin typeface="Newsreader"/>
+                <a:ea typeface="Newsreader"/>
+                <a:cs typeface="Newsreader"/>
+                <a:sym typeface="Newsreader"/>
+              </a:rPr>
+              <a:t>个人Agent被托付之前，先在这里练过</a:t>
+            </a:r>
+          </a:p>
+        </p:txBody>
+      </p:sp>
+      <p:sp>
+        <p:nvSpPr>
+          <p:cNvPr id="5004" name="SimReal 5004"/>
+          <p:cNvSpPr txBox="1"/>
+          <p:nvPr/>
+        </p:nvSpPr>
+        <p:spPr>
+          <a:xfrm>
+            <a:off x="548640" y="3749040"/>
             <a:ext cx="8412480" cy="329184"/>
           </a:xfrm>
           <a:prstGeom prst="rect">
@@ -6106,14 +6155,14 @@
                 <a:cs typeface="Instrument Sans"/>
                 <a:sym typeface="Instrument Sans"/>
               </a:rPr>
-              <a:t>用真实数据重建真实世界：AI实验室、企业与个人agent的训练场</a:t>
-            </a:r>
-          </a:p>
-        </p:txBody>
-      </p:sp>
-      <p:sp>
-        <p:nvSpPr>
-          <p:cNvPr id="5004" name="SimReal 5004"/>
+              <a:t>用真实数据重建真实场景：面向AI实验室、企业与个人Agent的训练环境与AI数据</a:t>
+            </a:r>
+          </a:p>
+        </p:txBody>
+      </p:sp>
+      <p:sp>
+        <p:nvSpPr>
+          <p:cNvPr id="5005" name="SimReal 5005"/>
           <p:cNvSpPr/>
           <p:nvPr/>
         </p:nvSpPr>
@@ -6142,7 +6191,7 @@
       </p:sp>
       <p:sp>
         <p:nvSpPr>
-          <p:cNvPr id="5005" name="SimReal 5005"/>
+          <p:cNvPr id="5006" name="SimReal 5006"/>
           <p:cNvSpPr txBox="1"/>
           <p:nvPr/>
         </p:nvSpPr>
@@ -6191,7 +6240,7 @@
       </p:sp>
       <p:sp>
         <p:nvSpPr>
-          <p:cNvPr id="5006" name="SimReal 5006"/>
+          <p:cNvPr id="5007" name="SimReal 5007"/>
           <p:cNvSpPr txBox="1"/>
           <p:nvPr/>
         </p:nvSpPr>
@@ -6240,7 +6289,7 @@
       </p:sp>
       <p:sp>
         <p:nvSpPr>
-          <p:cNvPr id="5007" name="SimReal 5007"/>
+          <p:cNvPr id="5008" name="SimReal 5008"/>
           <p:cNvSpPr txBox="1"/>
           <p:nvPr/>
         </p:nvSpPr>
@@ -6289,7 +6338,7 @@
       </p:sp>
       <p:sp>
         <p:nvSpPr>
-          <p:cNvPr id="5008" name="SimReal 5008"/>
+          <p:cNvPr id="5009" name="SimReal 5009"/>
           <p:cNvSpPr txBox="1"/>
           <p:nvPr/>
         </p:nvSpPr>
@@ -6338,7 +6387,7 @@
       </p:sp>
       <p:sp>
         <p:nvSpPr>
-          <p:cNvPr id="5009" name="SimReal 5009"/>
+          <p:cNvPr id="5010" name="SimReal 5010"/>
           <p:cNvSpPr txBox="1"/>
           <p:nvPr/>
         </p:nvSpPr>
@@ -8210,7 +8259,7 @@
                 <a:cs typeface="Newsreader"/>
                 <a:sym typeface="Newsreader"/>
               </a:rPr>
-              <a:t>今天实验室每年花85亿美元买训练数据与RL环境：</a:t>
+              <a:t>训练数据与RL环境，今天已是年收入约85亿美元的生意：</a:t>
             </a:r>
             <a:r>
               <a:rPr lang="zh-CN" sz="1800" b="0" i="0" u="none" strike="noStrike" cap="none">
@@ -10643,7 +10692,7 @@
                 <a:cs typeface="Newsreader"/>
                 <a:sym typeface="Newsreader"/>
               </a:rPr>
-              <a:t>下一步 · 个人agent</a:t>
+              <a:t>下一步 · 个人Agent</a:t>
             </a:r>
           </a:p>
         </p:txBody>
@@ -10692,7 +10741,7 @@
                 <a:cs typeface="Instrument Sans"/>
                 <a:sym typeface="Instrument Sans"/>
               </a:rPr>
-              <a:t>同一个世界，两类客户：实验室与agent</a:t>
+              <a:t>同一个世界，两类客户：实验室与Agent</a:t>
             </a:r>
           </a:p>
           <a:p>
@@ -10715,7 +10764,7 @@
                 <a:cs typeface="Instrument Sans"/>
                 <a:sym typeface="Instrument Sans"/>
               </a:rPr>
-              <a:t>agent付费练习，默认保密</a:t>
+              <a:t>Agent付费练习，默认保密</a:t>
             </a:r>
           </a:p>
           <a:p>
@@ -14890,7 +14939,7 @@
                 <a:cs typeface="IBM Plex Mono"/>
                 <a:sym typeface="IBM Plex Mono"/>
               </a:rPr>
-              <a:t>今天 · 实验室在买</a:t>
+              <a:t>今天 · 供应商收入</a:t>
             </a:r>
           </a:p>
         </p:txBody>
@@ -14988,7 +15037,7 @@
                 <a:cs typeface="Instrument Sans"/>
                 <a:sym typeface="Instrument Sans"/>
               </a:rPr>
-              <a:t>训练数据与RL环境，50余家供应商合计</a:t>
+              <a:t>50余家训练数据与RL环境供应商合计</a:t>
             </a:r>
           </a:p>
         </p:txBody>
@@ -15037,7 +15086,7 @@
                 <a:cs typeface="Instrument Sans"/>
                 <a:sym typeface="Instrument Sans"/>
               </a:rPr>
-              <a:t>头部三家收入（Surge为2024年，其余为年化）</a:t>
+              <a:t>头部公司收入（Surge为2024年，其余为年化毛营收）</a:t>
             </a:r>
           </a:p>
         </p:txBody>
@@ -15340,7 +15389,7 @@
                 <a:cs typeface="Newsreader"/>
                 <a:sym typeface="Newsreader"/>
               </a:rPr>
-              <a:t>Snorkel AI</a:t>
+              <a:t>Handshake</a:t>
             </a:r>
           </a:p>
         </p:txBody>
@@ -15354,7 +15403,7 @@
         <p:spPr>
           <a:xfrm>
             <a:off x="1600200" y="4014216"/>
-            <a:ext cx="257175" cy="219456"/>
+            <a:ext cx="685800" cy="219456"/>
           </a:xfrm>
           <a:prstGeom prst="rect">
             <a:avLst/>
@@ -15382,7 +15431,7 @@
         </p:nvSpPr>
         <p:spPr>
           <a:xfrm>
-            <a:off x="1930527" y="3986784"/>
+            <a:off x="2359152" y="3986784"/>
             <a:ext cx="1005840" cy="274320"/>
           </a:xfrm>
           <a:prstGeom prst="rect">
@@ -15418,7 +15467,7 @@
                 <a:cs typeface="Instrument Sans"/>
                 <a:sym typeface="Instrument Sans"/>
               </a:rPr>
-              <a:t>3.75亿美元</a:t>
+              <a:t>约10亿美元</a:t>
             </a:r>
           </a:p>
         </p:txBody>
@@ -16744,7 +16793,7 @@
                 <a:cs typeface="Instrument Sans"/>
                 <a:sym typeface="Instrument Sans"/>
               </a:rPr>
-              <a:t>来源：Menlo Ventures（2026.7）；Mercor年化毛营收（2026.6）、Surge收入（2024）、Snorkel年化收入（2026.9）；麦肯锡（2025.11）；IMF（2026.4）；科技公司年报。训练占比、美国以外渗透率为假设，详见A2。</a:t>
+              <a:t>来源：Menlo Ventures合伙人Deedy Das（2026.7）；Mercor年化毛营收（2026.6）、Handshake AI训练业务（2026.4）、Surge收入（2024）；麦肯锡（2025.11）；IMF（2026.4）；科技公司年报。训练占比、美国以外渗透率为假设，详见A2。</a:t>
             </a:r>
           </a:p>
         </p:txBody>
@@ -17406,7 +17455,7 @@
                 <a:cs typeface="IBM Plex Mono"/>
                 <a:sym typeface="IBM Plex Mono"/>
               </a:rPr>
-              <a:t>Mercor、Surge、AfterQuery</a:t>
+              <a:t>Mercor、Surge、Handshake、AfterQuery</a:t>
             </a:r>
           </a:p>
         </p:txBody>
@@ -17459,6 +17508,32 @@
                 <a:sym typeface="Instrument Sans"/>
               </a:rPr>
               <a:t>专家示范与判断，按人工意见打分</a:t>
+            </a:r>
+          </a:p>
+          <a:p>
+            <a:pPr marL="0" marR="0" lvl="0" indent="0" algn="l" rtl="0">
+              <a:lnSpc>
+                <a:spcPct val="110000"/>
+              </a:lnSpc>
+              <a:spcBef>
+                <a:spcPts val="419"/>
+              </a:spcBef>
+              <a:spcAft>
+                <a:spcPts val="0"/>
+              </a:spcAft>
+              <a:buNone/>
+            </a:pPr>
+            <a:r>
+              <a:rPr lang="zh-CN" sz="1200" b="0" i="0" u="none" strike="noStrike" cap="none">
+                <a:solidFill>
+                  <a:srgbClr val="33322F"/>
+                </a:solidFill>
+                <a:latin typeface="Instrument Sans"/>
+                <a:ea typeface="Instrument Sans"/>
+                <a:cs typeface="Instrument Sans"/>
+                <a:sym typeface="Instrument Sans"/>
+              </a:rPr>
+              <a:t>正进入RL环境：Mercor收购Deeptune</a:t>
             </a:r>
           </a:p>
         </p:txBody>
@@ -17637,7 +17712,7 @@
                 <a:cs typeface="Instrument Sans"/>
                 <a:sym typeface="Instrument Sans"/>
               </a:rPr>
-              <a:t>主要服务国内实验室：专家数据与评测</a:t>
+              <a:t>专家数据、评测环境与基准；主要服务国内实验室</a:t>
             </a:r>
           </a:p>
         </p:txBody>
@@ -18735,7 +18810,7 @@
                 <a:cs typeface="Instrument Sans"/>
                 <a:sym typeface="Instrument Sans"/>
               </a:rPr>
-              <a:t>据彭博报道，UniPat获阿里领投3亿美元（估值25亿美元）；Humanlaya完成鼎晖领投的数亿元Pre-A；阿里、字节、DeepSeek都已向两家采购。</a:t>
+              <a:t>据彭博报道，阿里拟领投UniPat 3亿美元（估值25亿美元）；Humanlaya完成鼎晖领投的数亿元Pre-A；阿里、字节、DeepSeek等都买过两家的数据或服务。</a:t>
             </a:r>
           </a:p>
         </p:txBody>
@@ -19284,7 +19359,7 @@
         <p:spPr>
           <a:xfrm>
             <a:off x="548640" y="1499616"/>
-            <a:ext cx="8229600" cy="201168"/>
+            <a:ext cx="10058400" cy="201168"/>
           </a:xfrm>
           <a:prstGeom prst="rect">
             <a:avLst/>
@@ -19319,7 +19394,7 @@
                 <a:cs typeface="IBM Plex Mono"/>
                 <a:sym typeface="IBM Plex Mono"/>
               </a:rPr>
-              <a:t>每一波热点，都由跑得最快的年轻团队拿下</a:t>
+              <a:t>每一波热点，都由跑得最快的年轻团队拿下；个人Agent这一波，Instinct创始人23岁</a:t>
             </a:r>
           </a:p>
         </p:txBody>
@@ -20801,7 +20876,33 @@
                 <a:cs typeface="Instrument Sans"/>
                 <a:sym typeface="Instrument Sans"/>
               </a:rPr>
-              <a:t>美元估值，加入YC 18个月</a:t>
+              <a:t>美元估值（据报道）</a:t>
+            </a:r>
+          </a:p>
+          <a:p>
+            <a:pPr marL="0" marR="0" lvl="0" indent="0" algn="l" rtl="0">
+              <a:lnSpc>
+                <a:spcPct val="100000"/>
+              </a:lnSpc>
+              <a:spcBef>
+                <a:spcPts val="0"/>
+              </a:spcBef>
+              <a:spcAft>
+                <a:spcPts val="0"/>
+              </a:spcAft>
+              <a:buNone/>
+            </a:pPr>
+            <a:r>
+              <a:rPr lang="zh-CN" sz="1050" b="0" i="0" u="none" strike="noStrike" cap="none">
+                <a:solidFill>
+                  <a:srgbClr val="33322F"/>
+                </a:solidFill>
+                <a:latin typeface="Instrument Sans"/>
+                <a:ea typeface="Instrument Sans"/>
+                <a:cs typeface="Instrument Sans"/>
+                <a:sym typeface="Instrument Sans"/>
+              </a:rPr>
+              <a:t>加入YC 18个月</a:t>
             </a:r>
           </a:p>
         </p:txBody>
@@ -20882,7 +20983,7 @@
                 <a:cs typeface="Instrument Sans"/>
                 <a:sym typeface="Instrument Sans"/>
               </a:rPr>
-              <a:t>两位约21岁的在校大学生创立</a:t>
+              <a:t>两位高中好友创立，现22、23岁</a:t>
             </a:r>
           </a:p>
         </p:txBody>
@@ -22816,7 +22917,7 @@
                 <a:cs typeface="Instrument Sans"/>
                 <a:sym typeface="Instrument Sans"/>
               </a:rPr>
-              <a:t>环境从付费试点推进到授权与复购；AI数据批量交付；RSI在实盘交易与事件预测上线；向个人agent开放练习</a:t>
+              <a:t>环境从付费试点推进到授权与复购；AI数据批量交付；RSI在实盘交易与事件预测上线；向个人Agent开放练习</a:t>
             </a:r>
           </a:p>
         </p:txBody>
@@ -23093,7 +23194,7 @@
                 <a:cs typeface="Instrument Sans"/>
                 <a:sym typeface="Instrument Sans"/>
               </a:rPr>
-              <a:t>阿里领投，腾讯、红杉中国跟投</a:t>
+              <a:t>阿里拟领投，腾讯、红杉中国参与</a:t>
             </a:r>
           </a:p>
         </p:txBody>
@@ -23171,7 +23272,7 @@
                 <a:cs typeface="IBM Plex Mono"/>
                 <a:sym typeface="IBM Plex Mono"/>
               </a:rPr>
-              <a:t>国内 · Humanlaya</a:t>
+              <a:t>国内 · 超衍智能</a:t>
             </a:r>
           </a:p>
         </p:txBody>
@@ -23220,7 +23321,7 @@
                 <a:cs typeface="Newsreader"/>
                 <a:sym typeface="Newsreader"/>
               </a:rPr>
-              <a:t>数亿元人民币</a:t>
+              <a:t>近4亿元人民币</a:t>
             </a:r>
           </a:p>
         </p:txBody>
@@ -23269,7 +23370,7 @@
                 <a:cs typeface="Instrument Sans"/>
                 <a:sym typeface="Instrument Sans"/>
               </a:rPr>
-              <a:t>Pre-A融资额（2026年9月）</a:t>
+              <a:t>自进化（RSI）天使轮（2026年9月）</a:t>
             </a:r>
           </a:p>
         </p:txBody>
@@ -23321,7 +23422,7 @@
                 <a:cs typeface="Instrument Sans"/>
                 <a:sym typeface="Instrument Sans"/>
               </a:rPr>
-              <a:t>鼎晖领投，红杉中国等参投</a:t>
+              <a:t>IDG资本等领投</a:t>
             </a:r>
           </a:p>
         </p:txBody>
@@ -23448,7 +23549,7 @@
                 <a:cs typeface="Newsreader"/>
                 <a:sym typeface="Newsreader"/>
               </a:rPr>
-              <a:t>1亿 → 约30亿美元</a:t>
+              <a:t>1亿 → 32.5亿美元</a:t>
             </a:r>
           </a:p>
         </p:txBody>
@@ -23497,7 +23598,7 @@
                 <a:cs typeface="Instrument Sans"/>
                 <a:sym typeface="Instrument Sans"/>
               </a:rPr>
-              <a:t>种子轮投后 → 14个月后（洽谈中）</a:t>
+              <a:t>种子轮 → 15个月（融资中）</a:t>
             </a:r>
           </a:p>
         </p:txBody>
@@ -23725,7 +23826,7 @@
                 <a:cs typeface="Instrument Sans"/>
                 <a:sym typeface="Instrument Sans"/>
               </a:rPr>
-              <a:t>A轮 → 5个月后</a:t>
+              <a:t>A轮 → 5个月后（据报道）</a:t>
             </a:r>
           </a:p>
         </p:txBody>
@@ -23826,7 +23927,7 @@
                 <a:cs typeface="Newsreader"/>
                 <a:sym typeface="Newsreader"/>
               </a:rPr>
-              <a:t>国内同赛道已获红杉中国、鼎晖、今日资本、BAI投资，阿里、腾讯也已入局：</a:t>
+              <a:t>国内同赛道已获红杉中国、鼎晖、今日资本、BAI、IDG投资，阿里、腾讯正在入局：</a:t>
             </a:r>
             <a:r>
               <a:rPr lang="zh-CN" sz="1700" b="0" i="0" u="none" strike="noStrike" cap="none">
@@ -23899,7 +24000,7 @@
                 <a:cs typeface="Instrument Sans"/>
                 <a:sym typeface="Instrument Sans"/>
               </a:rPr>
-              <a:t>UniPat为据报道估值，Applied Compute约30亿美元为洽谈中估值，Humanlaya为融资额；其余为投后估值。来源见A2。</a:t>
+              <a:t>UniPat与AfterQuery 32亿为据报道估值，Applied Compute 32.5亿为融资中估值，超衍智能为融资额；其余为投后估值。来源见A2。</a:t>
             </a:r>
           </a:p>
         </p:txBody>
@@ -25314,7 +25415,7 @@
                 <a:cs typeface="Instrument Sans"/>
                 <a:sym typeface="Instrument Sans"/>
               </a:rPr>
-              <a:t>前沿实验室、企业与agent开发者</a:t>
+              <a:t>前沿实验室、企业与Agent开发者</a:t>
             </a:r>
           </a:p>
         </p:txBody>
@@ -28003,7 +28104,7 @@
                 <a:cs typeface="Newsreader"/>
                 <a:sym typeface="Newsreader"/>
               </a:rPr>
-              <a:t>给AI和个人agent一个真实的世界，让它们反复犯错、学习、</a:t>
+              <a:t>给AI和个人Agent一个真实的世界，让它们反复犯错、学习、</a:t>
             </a:r>
             <a:r>
               <a:rPr lang="zh-CN" sz="1600" b="0" i="0" u="none" strike="noStrike" cap="none">
@@ -28246,7 +28347,7 @@
                 <a:cs typeface="Instrument Sans"/>
                 <a:sym typeface="Instrument Sans"/>
               </a:rPr>
-              <a:t>下一步：向个人agent开放练习</a:t>
+              <a:t>下一步：向个人Agent开放练习</a:t>
             </a:r>
           </a:p>
         </p:txBody>
@@ -29064,7 +29165,7 @@
                 <a:cs typeface="Instrument Sans"/>
                 <a:sym typeface="Instrument Sans"/>
               </a:rPr>
-              <a:t>今天实验室每年采购85亿美元训练数据与RL环境</a:t>
+              <a:t>今天训练数据与RL环境供应商年收入约85亿美元</a:t>
             </a:r>
           </a:p>
           <a:p>
@@ -30308,7 +30409,7 @@
                 <a:cs typeface="Instrument Sans"/>
                 <a:sym typeface="Instrument Sans"/>
               </a:rPr>
-              <a:t>Xitadel公开预览版：人类参考分80，前沿模型最高77.28（GPT 6），尚无模型越过人类水平线</a:t>
+              <a:t>Xitadel公开预览版：人类参考分80，前沿模型最高77.28（GPT-6），尚无模型越过人类水平线</a:t>
             </a:r>
           </a:p>
         </p:txBody>
@@ -30938,7 +31039,7 @@
                 <a:cs typeface="Newsreader"/>
                 <a:sym typeface="Newsreader"/>
               </a:rPr>
-              <a:t>个人agent</a:t>
+              <a:t>个人Agent</a:t>
             </a:r>
           </a:p>
         </p:txBody>
@@ -30987,7 +31088,7 @@
                 <a:cs typeface="Newsreader"/>
                 <a:sym typeface="Newsreader"/>
               </a:rPr>
-              <a:t>一个agent在替人做事之前，</a:t>
+              <a:t>一个Agent在替人做事之前，</a:t>
             </a:r>
             <a:r>
               <a:rPr lang="zh-CN" sz="1600" b="0" i="0" u="none" strike="noStrike" cap="none">
@@ -31013,7 +31114,7 @@
         <p:spPr>
           <a:xfrm>
             <a:off x="548640" y="1499616"/>
-            <a:ext cx="7315200" cy="201168"/>
+            <a:ext cx="8229600" cy="201168"/>
           </a:xfrm>
           <a:prstGeom prst="rect">
             <a:avLst/>
@@ -31048,7 +31149,7 @@
                 <a:cs typeface="IBM Plex Mono"/>
                 <a:sym typeface="IBM Plex Mono"/>
               </a:rPr>
-              <a:t>个人agent已经来了</a:t>
+              <a:t>2026年9月，个人Agent集体入场；国内千问、Manus同月跟进</a:t>
             </a:r>
           </a:p>
         </p:txBody>
@@ -31181,6 +31282,32 @@
               <a:t>Meta，9月8日上线</a:t>
             </a:r>
           </a:p>
+          <a:p>
+            <a:pPr marL="0" marR="0" lvl="0" indent="0" algn="l" rtl="0">
+              <a:lnSpc>
+                <a:spcPct val="110000"/>
+              </a:lnSpc>
+              <a:spcBef>
+                <a:spcPts val="0"/>
+              </a:spcBef>
+              <a:spcAft>
+                <a:spcPts val="0"/>
+              </a:spcAft>
+              <a:buNone/>
+            </a:pPr>
+            <a:r>
+              <a:rPr lang="zh-CN" sz="1200" b="0" i="0" u="none" strike="noStrike" cap="none">
+                <a:solidFill>
+                  <a:srgbClr val="33322F"/>
+                </a:solidFill>
+                <a:latin typeface="Instrument Sans"/>
+                <a:ea typeface="Instrument Sans"/>
+                <a:cs typeface="Instrument Sans"/>
+                <a:sym typeface="Instrument Sans"/>
+              </a:rPr>
+              <a:t>10天登顶美国App Store</a:t>
+            </a:r>
+          </a:p>
         </p:txBody>
       </p:sp>
       <p:sp>
@@ -31311,6 +31438,32 @@
               <a:t>OpenAI，9月29日发布</a:t>
             </a:r>
           </a:p>
+          <a:p>
+            <a:pPr marL="0" marR="0" lvl="0" indent="0" algn="l" rtl="0">
+              <a:lnSpc>
+                <a:spcPct val="110000"/>
+              </a:lnSpc>
+              <a:spcBef>
+                <a:spcPts val="0"/>
+              </a:spcBef>
+              <a:spcAft>
+                <a:spcPts val="0"/>
+              </a:spcAft>
+              <a:buNone/>
+            </a:pPr>
+            <a:r>
+              <a:rPr lang="zh-CN" sz="1200" b="0" i="0" u="none" strike="noStrike" cap="none">
+                <a:solidFill>
+                  <a:srgbClr val="33322F"/>
+                </a:solidFill>
+                <a:latin typeface="Instrument Sans"/>
+                <a:ea typeface="Instrument Sans"/>
+                <a:cs typeface="Instrument Sans"/>
+                <a:sym typeface="Instrument Sans"/>
+              </a:rPr>
+              <a:t>常驻云端，替人持续做事</a:t>
+            </a:r>
+          </a:p>
         </p:txBody>
       </p:sp>
       <p:sp>
@@ -31441,6 +31594,32 @@
               <a:t>Instinct估值，33天涨4倍</a:t>
             </a:r>
           </a:p>
+          <a:p>
+            <a:pPr marL="0" marR="0" lvl="0" indent="0" algn="l" rtl="0">
+              <a:lnSpc>
+                <a:spcPct val="110000"/>
+              </a:lnSpc>
+              <a:spcBef>
+                <a:spcPts val="0"/>
+              </a:spcBef>
+              <a:spcAft>
+                <a:spcPts val="0"/>
+              </a:spcAft>
+              <a:buNone/>
+            </a:pPr>
+            <a:r>
+              <a:rPr lang="zh-CN" sz="1200" b="0" i="0" u="none" strike="noStrike" cap="none">
+                <a:solidFill>
+                  <a:srgbClr val="33322F"/>
+                </a:solidFill>
+                <a:latin typeface="Instrument Sans"/>
+                <a:ea typeface="Instrument Sans"/>
+                <a:cs typeface="Instrument Sans"/>
+                <a:sym typeface="Instrument Sans"/>
+              </a:rPr>
+              <a:t>红杉、Benchmark、Coatue投资</a:t>
+            </a:r>
+          </a:p>
         </p:txBody>
       </p:sp>
       <p:sp>
@@ -31740,7 +31919,7 @@
                 <a:cs typeface="Newsreader"/>
                 <a:sym typeface="Newsreader"/>
               </a:rPr>
-              <a:t>agent变强</a:t>
+              <a:t>Agent变强</a:t>
             </a:r>
             <a:r>
               <a:rPr lang="zh-CN" sz="1600" b="0" i="0" u="none" strike="noStrike" cap="none">
@@ -31813,7 +31992,7 @@
                 <a:cs typeface="Instrument Sans"/>
                 <a:sym typeface="Instrument Sans"/>
               </a:rPr>
-              <a:t>交易世界已跑通这个循环：Qwen3.8-27B最高提升12%。本轮向个人agent开放交易与事件预测。</a:t>
+              <a:t>交易世界已跑通这个循环：Qwen3.8-27B最高提升12%。本轮向个人Agent开放交易与事件预测。</a:t>
             </a:r>
           </a:p>
         </p:txBody>
@@ -31862,7 +32041,7 @@
                 <a:cs typeface="Newsreader"/>
                 <a:sym typeface="Newsreader"/>
               </a:rPr>
-              <a:t>沙盒让agent不闯祸，</a:t>
+              <a:t>沙盒让Agent不闯祸，</a:t>
             </a:r>
             <a:r>
               <a:rPr lang="zh-CN" sz="2400" b="0" i="0" u="none" strike="noStrike" cap="none">
@@ -31935,7 +32114,7 @@
                 <a:cs typeface="Instrument Sans"/>
                 <a:sym typeface="Instrument Sans"/>
               </a:rPr>
-              <a:t>来源：Meta与OpenAI发布（2026年9月8日、29日）；Instinct公告（2026年9月28日）；Remote Labor Index（Scale AI与CAIS，2026年7月）。详见A2。</a:t>
+              <a:t>来源：Meta、OpenAI、千问、Manus发布（2026年9月）；TechCrunch（2026年9月25日）；Instinct（路透社，2026年9月28日）；Remote Labor Index（Scale AI与CAIS，2026年7月）。详见A2。</a:t>
             </a:r>
           </a:p>
         </p:txBody>
@@ -32362,7 +32541,7 @@
           <a:p>
             <a:pPr marL="0" marR="0" lvl="0" indent="0" algn="l" rtl="0">
               <a:lnSpc>
-                <a:spcPct val="112000"/>
+                <a:spcPct val="110000"/>
               </a:lnSpc>
               <a:spcBef>
                 <a:spcPts val="0"/>
@@ -32373,7 +32552,7 @@
               <a:buNone/>
             </a:pPr>
             <a:r>
-              <a:rPr lang="zh-CN" sz="900" b="1" i="0" u="none" strike="noStrike" cap="none">
+              <a:rPr lang="zh-CN" sz="850" b="1" i="0" u="none" strike="noStrike" cap="none">
                 <a:solidFill>
                   <a:srgbClr val="111110"/>
                 </a:solidFill>
@@ -32385,7 +32564,7 @@
               <a:t>Mercor年化收入：</a:t>
             </a:r>
             <a:r>
-              <a:rPr lang="zh-CN" sz="900" b="0" i="0" u="none" strike="noStrike" cap="none">
+              <a:rPr lang="zh-CN" sz="850" b="0" i="0" u="none" strike="noStrike" cap="none">
                 <a:solidFill>
                   <a:srgbClr val="33322F"/>
                 </a:solidFill>
@@ -32394,13 +32573,13 @@
                 <a:cs typeface="Instrument Sans"/>
                 <a:sym typeface="Instrument Sans"/>
               </a:rPr>
-              <a:t>TechCrunch（2025年2月，7,500万美元）；CEO（2025年9月，5亿美元）；</a:t>
+              <a:t>TechCrunch（2025年2月，7,500万美元）；Sacra（2025年12月，7.6亿美元）；</a:t>
             </a:r>
             <a:br>
-              <a:rPr lang="zh-CN" sz="900"/>
+              <a:rPr lang="zh-CN" sz="850"/>
             </a:br>
             <a:r>
-              <a:rPr lang="zh-CN" sz="900" b="0" i="0" u="none" strike="noStrike" cap="none">
+              <a:rPr lang="zh-CN" sz="850" b="0" i="0" u="none" strike="noStrike" cap="none">
                 <a:solidFill>
                   <a:srgbClr val="33322F"/>
                 </a:solidFill>
@@ -32409,13 +32588,51 @@
                 <a:cs typeface="Instrument Sans"/>
                 <a:sym typeface="Instrument Sans"/>
               </a:rPr>
-              <a:t>Sacra（2025年12月，7.6亿美元）；Mercor（2026年初，10亿美元）；</a:t>
+              <a:t>Dealroom、福布斯（2026年6月，20亿美元）。均为毛营收，专家拿走60–70%（彭博）</a:t>
+            </a:r>
+          </a:p>
+          <a:p>
+            <a:pPr marL="0" marR="0" lvl="0" indent="0" algn="l" rtl="0">
+              <a:lnSpc>
+                <a:spcPct val="110000"/>
+              </a:lnSpc>
+              <a:spcBef>
+                <a:spcPts val="400"/>
+              </a:spcBef>
+              <a:spcAft>
+                <a:spcPts val="0"/>
+              </a:spcAft>
+              <a:buNone/>
+            </a:pPr>
+            <a:r>
+              <a:rPr lang="zh-CN" sz="850" b="1" i="0" u="none" strike="noStrike" cap="none">
+                <a:solidFill>
+                  <a:srgbClr val="111110"/>
+                </a:solidFill>
+                <a:latin typeface="Instrument Sans"/>
+                <a:ea typeface="Instrument Sans"/>
+                <a:cs typeface="Instrument Sans"/>
+                <a:sym typeface="Instrument Sans"/>
+              </a:rPr>
+              <a:t>Mercor估值与收购：</a:t>
+            </a:r>
+            <a:r>
+              <a:rPr lang="zh-CN" sz="850" b="0" i="0" u="none" strike="noStrike" cap="none">
+                <a:solidFill>
+                  <a:srgbClr val="33322F"/>
+                </a:solidFill>
+                <a:latin typeface="Instrument Sans"/>
+                <a:ea typeface="Instrument Sans"/>
+                <a:cs typeface="Instrument Sans"/>
+                <a:sym typeface="Instrument Sans"/>
+              </a:rPr>
+              <a:t>C轮100亿美元（2025年10月）；200亿美元估值仍在洽谈（彭博，2026年7月9日；</a:t>
             </a:r>
             <a:br>
-              <a:rPr lang="zh-CN" sz="900"/>
+              <a:rPr lang="zh-CN" sz="850"/>
             </a:br>
             <a:r>
-              <a:rPr lang="zh-CN" sz="900" b="0" i="0" u="none" strike="noStrike" cap="none">
+              <a:rPr lang="zh-CN" sz="850" b="0" i="0" u="none" strike="noStrike" cap="none">
                 <a:solidFill>
                   <a:srgbClr val="33322F"/>
                 </a:solidFill>
@@ -32424,24 +32641,24 @@
                 <a:cs typeface="Instrument Sans"/>
                 <a:sym typeface="Instrument Sans"/>
               </a:rPr>
-              <a:t>Dealroom（2026年6月，20亿美元）。均为毛营收，专家拿走60–70%（彭博）</a:t>
+              <a:t>The Information，2026年8月）；2026年7月9日宣布收购RL环境公司Deeptune（福布斯）</a:t>
             </a:r>
           </a:p>
           <a:p>
             <a:pPr marL="0" marR="0" lvl="0" indent="0" algn="l" rtl="0">
               <a:lnSpc>
-                <a:spcPct val="112000"/>
+                <a:spcPct val="110000"/>
               </a:lnSpc>
               <a:spcBef>
-                <a:spcPts val="500"/>
-              </a:spcBef>
-              <a:spcAft>
-                <a:spcPts val="0"/>
-              </a:spcAft>
-              <a:buNone/>
-            </a:pPr>
-            <a:r>
-              <a:rPr lang="zh-CN" sz="900" b="1" i="0" u="none" strike="noStrike" cap="none">
+                <a:spcPts val="400"/>
+              </a:spcBef>
+              <a:spcAft>
+                <a:spcPts val="0"/>
+              </a:spcAft>
+              <a:buNone/>
+            </a:pPr>
+            <a:r>
+              <a:rPr lang="zh-CN" sz="850" b="1" i="0" u="none" strike="noStrike" cap="none">
                 <a:solidFill>
                   <a:srgbClr val="111110"/>
                 </a:solidFill>
@@ -32450,10 +32667,10 @@
                 <a:cs typeface="Instrument Sans"/>
                 <a:sym typeface="Instrument Sans"/>
               </a:rPr>
-              <a:t>Mercor估值：</a:t>
-            </a:r>
-            <a:r>
-              <a:rPr lang="zh-CN" sz="900" b="0" i="0" u="none" strike="noStrike" cap="none">
+              <a:t>Surge AI：</a:t>
+            </a:r>
+            <a:r>
+              <a:rPr lang="zh-CN" sz="850" b="0" i="0" u="none" strike="noStrike" cap="none">
                 <a:solidFill>
                   <a:srgbClr val="33322F"/>
                 </a:solidFill>
@@ -32462,13 +32679,89 @@
                 <a:cs typeface="Instrument Sans"/>
                 <a:sym typeface="Instrument Sans"/>
               </a:rPr>
-              <a:t>A轮2.5亿（2024年9月）、B轮20亿（2025年2月）、C轮100亿美元（2025年10月）；</a:t>
+              <a:t>2024年收入12亿美元（TechCrunch、福布斯）</a:t>
+            </a:r>
+          </a:p>
+          <a:p>
+            <a:pPr marL="0" marR="0" lvl="0" indent="0" algn="l" rtl="0">
+              <a:lnSpc>
+                <a:spcPct val="110000"/>
+              </a:lnSpc>
+              <a:spcBef>
+                <a:spcPts val="400"/>
+              </a:spcBef>
+              <a:spcAft>
+                <a:spcPts val="0"/>
+              </a:spcAft>
+              <a:buNone/>
+            </a:pPr>
+            <a:r>
+              <a:rPr lang="zh-CN" sz="850" b="1" i="0" u="none" strike="noStrike" cap="none">
+                <a:solidFill>
+                  <a:srgbClr val="111110"/>
+                </a:solidFill>
+                <a:latin typeface="Instrument Sans"/>
+                <a:ea typeface="Instrument Sans"/>
+                <a:cs typeface="Instrument Sans"/>
+                <a:sym typeface="Instrument Sans"/>
+              </a:rPr>
+              <a:t>Handshake：</a:t>
+            </a:r>
+            <a:r>
+              <a:rPr lang="zh-CN" sz="850" b="0" i="0" u="none" strike="noStrike" cap="none">
+                <a:solidFill>
+                  <a:srgbClr val="33322F"/>
+                </a:solidFill>
+                <a:latin typeface="Instrument Sans"/>
+                <a:ea typeface="Instrument Sans"/>
+                <a:cs typeface="Instrument Sans"/>
+                <a:sym typeface="Instrument Sans"/>
+              </a:rPr>
+              <a:t>AI训练业务年化毛营收近10亿美元（The Information，2026年4月）</a:t>
+            </a:r>
+          </a:p>
+          <a:p>
+            <a:pPr marL="0" marR="0" lvl="0" indent="0" algn="l" rtl="0">
+              <a:lnSpc>
+                <a:spcPct val="110000"/>
+              </a:lnSpc>
+              <a:spcBef>
+                <a:spcPts val="400"/>
+              </a:spcBef>
+              <a:spcAft>
+                <a:spcPts val="0"/>
+              </a:spcAft>
+              <a:buNone/>
+            </a:pPr>
+            <a:r>
+              <a:rPr lang="zh-CN" sz="850" b="1" i="0" u="none" strike="noStrike" cap="none">
+                <a:solidFill>
+                  <a:srgbClr val="111110"/>
+                </a:solidFill>
+                <a:latin typeface="Instrument Sans"/>
+                <a:ea typeface="Instrument Sans"/>
+                <a:cs typeface="Instrument Sans"/>
+                <a:sym typeface="Instrument Sans"/>
+              </a:rPr>
+              <a:t>Snorkel AI：</a:t>
+            </a:r>
+            <a:r>
+              <a:rPr lang="zh-CN" sz="850" b="0" i="0" u="none" strike="noStrike" cap="none">
+                <a:solidFill>
+                  <a:srgbClr val="33322F"/>
+                </a:solidFill>
+                <a:latin typeface="Instrument Sans"/>
+                <a:ea typeface="Instrument Sans"/>
+                <a:cs typeface="Instrument Sans"/>
+                <a:sym typeface="Instrument Sans"/>
+              </a:rPr>
+              <a:t>路透社、TechCrunch，2026年9月22日（以35亿美元估值融资3.5亿美元；</a:t>
             </a:r>
             <a:br>
-              <a:rPr lang="zh-CN" sz="900"/>
+              <a:rPr lang="zh-CN" sz="850"/>
             </a:br>
             <a:r>
-              <a:rPr lang="zh-CN" sz="900" b="0" i="0" u="none" strike="noStrike" cap="none">
+              <a:rPr lang="zh-CN" sz="850" b="0" i="0" u="none" strike="noStrike" cap="none">
                 <a:solidFill>
                   <a:srgbClr val="33322F"/>
                 </a:solidFill>
@@ -32477,24 +32770,24 @@
                 <a:cs typeface="Instrument Sans"/>
                 <a:sym typeface="Instrument Sans"/>
               </a:rPr>
-              <a:t>200亿美元估值轮次处于早期洽谈（彭博，2026年7月9日）</a:t>
+              <a:t>年化收入3.75亿美元，一年增长约18倍）</a:t>
             </a:r>
           </a:p>
           <a:p>
             <a:pPr marL="0" marR="0" lvl="0" indent="0" algn="l" rtl="0">
               <a:lnSpc>
-                <a:spcPct val="112000"/>
+                <a:spcPct val="110000"/>
               </a:lnSpc>
               <a:spcBef>
-                <a:spcPts val="500"/>
-              </a:spcBef>
-              <a:spcAft>
-                <a:spcPts val="0"/>
-              </a:spcAft>
-              <a:buNone/>
-            </a:pPr>
-            <a:r>
-              <a:rPr lang="zh-CN" sz="900" b="1" i="0" u="none" strike="noStrike" cap="none">
+                <a:spcPts val="400"/>
+              </a:spcBef>
+              <a:spcAft>
+                <a:spcPts val="0"/>
+              </a:spcAft>
+              <a:buNone/>
+            </a:pPr>
+            <a:r>
+              <a:rPr lang="zh-CN" sz="850" b="1" i="0" u="none" strike="noStrike" cap="none">
                 <a:solidFill>
                   <a:srgbClr val="111110"/>
                 </a:solidFill>
@@ -32503,10 +32796,10 @@
                 <a:cs typeface="Instrument Sans"/>
                 <a:sym typeface="Instrument Sans"/>
               </a:rPr>
-              <a:t>Surge AI：</a:t>
-            </a:r>
-            <a:r>
-              <a:rPr lang="zh-CN" sz="900" b="0" i="0" u="none" strike="noStrike" cap="none">
+              <a:t>AfterQuery：</a:t>
+            </a:r>
+            <a:r>
+              <a:rPr lang="zh-CN" sz="850" b="0" i="0" u="none" strike="noStrike" cap="none">
                 <a:solidFill>
                   <a:srgbClr val="33322F"/>
                 </a:solidFill>
@@ -32515,24 +32808,54 @@
                 <a:cs typeface="Instrument Sans"/>
                 <a:sym typeface="Instrument Sans"/>
               </a:rPr>
-              <a:t>2024年收入12亿美元（TechCrunch、福布斯）</a:t>
+              <a:t>2025年2月成立；Business Wire（2026年4月，A轮估值3亿美元，年化收入1亿美元）；</a:t>
+            </a:r>
+            <a:br>
+              <a:rPr lang="zh-CN" sz="850"/>
+            </a:br>
+            <a:r>
+              <a:rPr lang="zh-CN" sz="850" b="0" i="0" u="none" strike="noStrike" cap="none">
+                <a:solidFill>
+                  <a:srgbClr val="33322F"/>
+                </a:solidFill>
+                <a:latin typeface="Instrument Sans"/>
+                <a:ea typeface="Instrument Sans"/>
+                <a:cs typeface="Instrument Sans"/>
+                <a:sym typeface="Instrument Sans"/>
+              </a:rPr>
+              <a:t>福布斯、TechCrunch（2026年9月1日，据报道估值32亿美元；创始人为高中好友，现22、23岁）；</a:t>
+            </a:r>
+            <a:br>
+              <a:rPr lang="zh-CN" sz="850"/>
+            </a:br>
+            <a:r>
+              <a:rPr lang="zh-CN" sz="850" b="0" i="0" u="none" strike="noStrike" cap="none">
+                <a:solidFill>
+                  <a:srgbClr val="33322F"/>
+                </a:solidFill>
+                <a:latin typeface="Instrument Sans"/>
+                <a:ea typeface="Instrument Sans"/>
+                <a:cs typeface="Instrument Sans"/>
+                <a:sym typeface="Instrument Sans"/>
+              </a:rPr>
+              <a:t>YC公司页（联合创始人曾在Citadel Securities实习）</a:t>
             </a:r>
           </a:p>
           <a:p>
             <a:pPr marL="0" marR="0" lvl="0" indent="0" algn="l" rtl="0">
               <a:lnSpc>
-                <a:spcPct val="112000"/>
+                <a:spcPct val="110000"/>
               </a:lnSpc>
               <a:spcBef>
-                <a:spcPts val="500"/>
-              </a:spcBef>
-              <a:spcAft>
-                <a:spcPts val="0"/>
-              </a:spcAft>
-              <a:buNone/>
-            </a:pPr>
-            <a:r>
-              <a:rPr lang="zh-CN" sz="900" b="1" i="0" u="none" strike="noStrike" cap="none">
+                <a:spcPts val="400"/>
+              </a:spcBef>
+              <a:spcAft>
+                <a:spcPts val="0"/>
+              </a:spcAft>
+              <a:buNone/>
+            </a:pPr>
+            <a:r>
+              <a:rPr lang="zh-CN" sz="850" b="1" i="0" u="none" strike="noStrike" cap="none">
                 <a:solidFill>
                   <a:srgbClr val="111110"/>
                 </a:solidFill>
@@ -32541,10 +32864,10 @@
                 <a:cs typeface="Instrument Sans"/>
                 <a:sym typeface="Instrument Sans"/>
               </a:rPr>
-              <a:t>Snorkel AI：</a:t>
-            </a:r>
-            <a:r>
-              <a:rPr lang="zh-CN" sz="900" b="0" i="0" u="none" strike="noStrike" cap="none">
+              <a:t>Scale AI：</a:t>
+            </a:r>
+            <a:r>
+              <a:rPr lang="zh-CN" sz="850" b="0" i="0" u="none" strike="noStrike" cap="none">
                 <a:solidFill>
                   <a:srgbClr val="33322F"/>
                 </a:solidFill>
@@ -32553,13 +32876,13 @@
                 <a:cs typeface="Instrument Sans"/>
                 <a:sym typeface="Instrument Sans"/>
               </a:rPr>
-              <a:t>公司公告及TechCrunch，2026年9月22日（以35亿美元估值融资3.5亿美元；</a:t>
+              <a:t>2016年由19岁的Alexandr Wang创立（福布斯）；</a:t>
             </a:r>
             <a:br>
-              <a:rPr lang="zh-CN" sz="900"/>
+              <a:rPr lang="zh-CN" sz="850"/>
             </a:br>
             <a:r>
-              <a:rPr lang="zh-CN" sz="900" b="0" i="0" u="none" strike="noStrike" cap="none">
+              <a:rPr lang="zh-CN" sz="850" b="0" i="0" u="none" strike="noStrike" cap="none">
                 <a:solidFill>
                   <a:srgbClr val="33322F"/>
                 </a:solidFill>
@@ -32568,24 +32891,24 @@
                 <a:cs typeface="Instrument Sans"/>
                 <a:sym typeface="Instrument Sans"/>
               </a:rPr>
-              <a:t>年化收入3.75亿美元，一年增长18倍）</a:t>
+              <a:t>Meta以143亿美元取得49%股份，估值约290亿美元（路透社，2025年6月）</a:t>
             </a:r>
           </a:p>
           <a:p>
             <a:pPr marL="0" marR="0" lvl="0" indent="0" algn="l" rtl="0">
               <a:lnSpc>
-                <a:spcPct val="112000"/>
+                <a:spcPct val="110000"/>
               </a:lnSpc>
               <a:spcBef>
-                <a:spcPts val="500"/>
-              </a:spcBef>
-              <a:spcAft>
-                <a:spcPts val="0"/>
-              </a:spcAft>
-              <a:buNone/>
-            </a:pPr>
-            <a:r>
-              <a:rPr lang="zh-CN" sz="900" b="1" i="0" u="none" strike="noStrike" cap="none">
+                <a:spcPts val="400"/>
+              </a:spcBef>
+              <a:spcAft>
+                <a:spcPts val="0"/>
+              </a:spcAft>
+              <a:buNone/>
+            </a:pPr>
+            <a:r>
+              <a:rPr lang="zh-CN" sz="850" b="1" i="0" u="none" strike="noStrike" cap="none">
                 <a:solidFill>
                   <a:srgbClr val="111110"/>
                 </a:solidFill>
@@ -32594,10 +32917,10 @@
                 <a:cs typeface="Instrument Sans"/>
                 <a:sym typeface="Instrument Sans"/>
               </a:rPr>
-              <a:t>AfterQuery：</a:t>
-            </a:r>
-            <a:r>
-              <a:rPr lang="zh-CN" sz="900" b="0" i="0" u="none" strike="noStrike" cap="none">
+              <a:t>Mechanize：</a:t>
+            </a:r>
+            <a:r>
+              <a:rPr lang="zh-CN" sz="850" b="0" i="0" u="none" strike="noStrike" cap="none">
                 <a:solidFill>
                   <a:srgbClr val="33322F"/>
                 </a:solidFill>
@@ -32606,13 +32929,51 @@
                 <a:cs typeface="Instrument Sans"/>
                 <a:sym typeface="Instrument Sans"/>
               </a:rPr>
-              <a:t>2025年2月成立；福布斯，2026年9月1日（加入YC 18个月，估值32亿美元）；</a:t>
+              <a:t>Business Insider（2026年8月、9月）：谷歌人才与技术授权交易，据报道逾15亿美元</a:t>
+            </a:r>
+          </a:p>
+          <a:p>
+            <a:pPr marL="0" marR="0" lvl="0" indent="0" algn="l" rtl="0">
+              <a:lnSpc>
+                <a:spcPct val="110000"/>
+              </a:lnSpc>
+              <a:spcBef>
+                <a:spcPts val="400"/>
+              </a:spcBef>
+              <a:spcAft>
+                <a:spcPts val="0"/>
+              </a:spcAft>
+              <a:buNone/>
+            </a:pPr>
+            <a:r>
+              <a:rPr lang="zh-CN" sz="850" b="1" i="0" u="none" strike="noStrike" cap="none">
+                <a:solidFill>
+                  <a:srgbClr val="111110"/>
+                </a:solidFill>
+                <a:latin typeface="Instrument Sans"/>
+                <a:ea typeface="Instrument Sans"/>
+                <a:cs typeface="Instrument Sans"/>
+                <a:sym typeface="Instrument Sans"/>
+              </a:rPr>
+              <a:t>UniPat：</a:t>
+            </a:r>
+            <a:r>
+              <a:rPr lang="zh-CN" sz="850" b="0" i="0" u="none" strike="noStrike" cap="none">
+                <a:solidFill>
+                  <a:srgbClr val="33322F"/>
+                </a:solidFill>
+                <a:latin typeface="Instrument Sans"/>
+                <a:ea typeface="Instrument Sans"/>
+                <a:cs typeface="Instrument Sans"/>
+                <a:sym typeface="Instrument Sans"/>
+              </a:rPr>
+              <a:t>彭博，2026年9月10日（阿里拟领投3亿美元，据报道估值25亿美元，</a:t>
             </a:r>
             <a:br>
-              <a:rPr lang="zh-CN" sz="900"/>
+              <a:rPr lang="zh-CN" sz="850"/>
             </a:br>
             <a:r>
-              <a:rPr lang="zh-CN" sz="900" b="0" i="0" u="none" strike="noStrike" cap="none">
+              <a:rPr lang="zh-CN" sz="850" b="0" i="0" u="none" strike="noStrike" cap="none">
                 <a:solidFill>
                   <a:srgbClr val="33322F"/>
                 </a:solidFill>
@@ -32621,13 +32982,13 @@
                 <a:cs typeface="Instrument Sans"/>
                 <a:sym typeface="Instrument Sans"/>
               </a:rPr>
-              <a:t>Business Wire（2026年4月，A轮估值3亿美元，年化收入1亿美元）；</a:t>
+              <a:t>腾讯、红杉中国参与，谈判仍在进行；阿里、字节、DeepSeek等</a:t>
             </a:r>
             <a:br>
-              <a:rPr lang="zh-CN" sz="900"/>
+              <a:rPr lang="zh-CN" sz="850"/>
             </a:br>
             <a:r>
-              <a:rPr lang="zh-CN" sz="900" b="0" i="0" u="none" strike="noStrike" cap="none">
+              <a:rPr lang="zh-CN" sz="850" b="0" i="0" u="none" strike="noStrike" cap="none">
                 <a:solidFill>
                   <a:srgbClr val="33322F"/>
                 </a:solidFill>
@@ -32636,24 +32997,24 @@
                 <a:cs typeface="Instrument Sans"/>
                 <a:sym typeface="Instrument Sans"/>
               </a:rPr>
-              <a:t>YC公司页（联合创始人曾在Citadel Securities实习）</a:t>
+              <a:t>买过UniPat与Humanlaya的数据或服务）；36氪（2026年9月24日）</a:t>
             </a:r>
           </a:p>
           <a:p>
             <a:pPr marL="0" marR="0" lvl="0" indent="0" algn="l" rtl="0">
               <a:lnSpc>
-                <a:spcPct val="112000"/>
+                <a:spcPct val="110000"/>
               </a:lnSpc>
               <a:spcBef>
-                <a:spcPts val="500"/>
-              </a:spcBef>
-              <a:spcAft>
-                <a:spcPts val="0"/>
-              </a:spcAft>
-              <a:buNone/>
-            </a:pPr>
-            <a:r>
-              <a:rPr lang="zh-CN" sz="900" b="1" i="0" u="none" strike="noStrike" cap="none">
+                <a:spcPts val="400"/>
+              </a:spcBef>
+              <a:spcAft>
+                <a:spcPts val="0"/>
+              </a:spcAft>
+              <a:buNone/>
+            </a:pPr>
+            <a:r>
+              <a:rPr lang="zh-CN" sz="850" b="1" i="0" u="none" strike="noStrike" cap="none">
                 <a:solidFill>
                   <a:srgbClr val="111110"/>
                 </a:solidFill>
@@ -32662,10 +33023,10 @@
                 <a:cs typeface="Instrument Sans"/>
                 <a:sym typeface="Instrument Sans"/>
               </a:rPr>
-              <a:t>Scale AI：</a:t>
-            </a:r>
-            <a:r>
-              <a:rPr lang="zh-CN" sz="900" b="0" i="0" u="none" strike="noStrike" cap="none">
+              <a:t>Humanlaya：</a:t>
+            </a:r>
+            <a:r>
+              <a:rPr lang="zh-CN" sz="850" b="0" i="0" u="none" strike="noStrike" cap="none">
                 <a:solidFill>
                   <a:srgbClr val="33322F"/>
                 </a:solidFill>
@@ -32674,13 +33035,13 @@
                 <a:cs typeface="Instrument Sans"/>
                 <a:sym typeface="Instrument Sans"/>
               </a:rPr>
-              <a:t>2016年由19岁的Alexandr Wang创立（福布斯）；</a:t>
+              <a:t>2025年成立；2026年9月完成数亿元人民币Pre-A，鼎晖领投，</a:t>
             </a:r>
             <a:br>
-              <a:rPr lang="zh-CN" sz="900"/>
+              <a:rPr lang="zh-CN" sz="850"/>
             </a:br>
             <a:r>
-              <a:rPr lang="zh-CN" sz="900" b="0" i="0" u="none" strike="noStrike" cap="none">
+              <a:rPr lang="zh-CN" sz="850" b="0" i="0" u="none" strike="noStrike" cap="none">
                 <a:solidFill>
                   <a:srgbClr val="33322F"/>
                 </a:solidFill>
@@ -32689,13 +33050,51 @@
                 <a:cs typeface="Instrument Sans"/>
                 <a:sym typeface="Instrument Sans"/>
               </a:rPr>
-              <a:t>Meta以143亿美元取得49%股份，估值约290亿美元（路透社，2025年6月）；</a:t>
+              <a:t>红杉中国、今日资本、BAI参投（界面新闻、东方财富）</a:t>
+            </a:r>
+          </a:p>
+          <a:p>
+            <a:pPr marL="0" marR="0" lvl="0" indent="0" algn="l" rtl="0">
+              <a:lnSpc>
+                <a:spcPct val="110000"/>
+              </a:lnSpc>
+              <a:spcBef>
+                <a:spcPts val="400"/>
+              </a:spcBef>
+              <a:spcAft>
+                <a:spcPts val="0"/>
+              </a:spcAft>
+              <a:buNone/>
+            </a:pPr>
+            <a:r>
+              <a:rPr lang="zh-CN" sz="850" b="1" i="0" u="none" strike="noStrike" cap="none">
+                <a:solidFill>
+                  <a:srgbClr val="111110"/>
+                </a:solidFill>
+                <a:latin typeface="Instrument Sans"/>
+                <a:ea typeface="Instrument Sans"/>
+                <a:cs typeface="Instrument Sans"/>
+                <a:sym typeface="Instrument Sans"/>
+              </a:rPr>
+              <a:t>超衍智能：</a:t>
+            </a:r>
+            <a:r>
+              <a:rPr lang="zh-CN" sz="850" b="0" i="0" u="none" strike="noStrike" cap="none">
+                <a:solidFill>
+                  <a:srgbClr val="33322F"/>
+                </a:solidFill>
+                <a:latin typeface="Instrument Sans"/>
+                <a:ea typeface="Instrument Sans"/>
+                <a:cs typeface="Instrument Sans"/>
+                <a:sym typeface="Instrument Sans"/>
+              </a:rPr>
+              <a:t>36氪（2026年9月16日）：自进化（RSI）模型公司，天使与天使+轮合计近4亿元，</a:t>
             </a:r>
             <a:br>
-              <a:rPr lang="zh-CN" sz="900"/>
+              <a:rPr lang="zh-CN" sz="850"/>
             </a:br>
             <a:r>
-              <a:rPr lang="zh-CN" sz="900" b="0" i="0" u="none" strike="noStrike" cap="none">
+              <a:rPr lang="zh-CN" sz="850" b="0" i="0" u="none" strike="noStrike" cap="none">
                 <a:solidFill>
                   <a:srgbClr val="33322F"/>
                 </a:solidFill>
@@ -32704,98 +33103,7 @@
                 <a:cs typeface="Instrument Sans"/>
                 <a:sym typeface="Instrument Sans"/>
               </a:rPr>
-              <a:t>近一半新训练项目涉及RL环境（Scale AI博客，2026年2月）</a:t>
-            </a:r>
-          </a:p>
-          <a:p>
-            <a:pPr marL="0" marR="0" lvl="0" indent="0" algn="l" rtl="0">
-              <a:lnSpc>
-                <a:spcPct val="112000"/>
-              </a:lnSpc>
-              <a:spcBef>
-                <a:spcPts val="500"/>
-              </a:spcBef>
-              <a:spcAft>
-                <a:spcPts val="0"/>
-              </a:spcAft>
-              <a:buNone/>
-            </a:pPr>
-            <a:r>
-              <a:rPr lang="zh-CN" sz="900" b="1" i="0" u="none" strike="noStrike" cap="none">
-                <a:solidFill>
-                  <a:srgbClr val="111110"/>
-                </a:solidFill>
-                <a:latin typeface="Instrument Sans"/>
-                <a:ea typeface="Instrument Sans"/>
-                <a:cs typeface="Instrument Sans"/>
-                <a:sym typeface="Instrument Sans"/>
-              </a:rPr>
-              <a:t>UniPat：</a:t>
-            </a:r>
-            <a:r>
-              <a:rPr lang="zh-CN" sz="900" b="0" i="0" u="none" strike="noStrike" cap="none">
-                <a:solidFill>
-                  <a:srgbClr val="33322F"/>
-                </a:solidFill>
-                <a:latin typeface="Instrument Sans"/>
-                <a:ea typeface="Instrument Sans"/>
-                <a:cs typeface="Instrument Sans"/>
-                <a:sym typeface="Instrument Sans"/>
-              </a:rPr>
-              <a:t>彭博，2026年9月10日（阿里领投3亿美元，据报道估值25亿美元，腾讯、红杉中国跟投；条款可能变化；阿里、字节、DeepSeek等向UniPat与Humanlaya采购）</a:t>
-            </a:r>
-          </a:p>
-          <a:p>
-            <a:pPr marL="0" marR="0" lvl="0" indent="0" algn="l" rtl="0">
-              <a:lnSpc>
-                <a:spcPct val="112000"/>
-              </a:lnSpc>
-              <a:spcBef>
-                <a:spcPts val="500"/>
-              </a:spcBef>
-              <a:spcAft>
-                <a:spcPts val="0"/>
-              </a:spcAft>
-              <a:buNone/>
-            </a:pPr>
-            <a:r>
-              <a:rPr lang="zh-CN" sz="900" b="1" i="0" u="none" strike="noStrike" cap="none">
-                <a:solidFill>
-                  <a:srgbClr val="111110"/>
-                </a:solidFill>
-                <a:latin typeface="Instrument Sans"/>
-                <a:ea typeface="Instrument Sans"/>
-                <a:cs typeface="Instrument Sans"/>
-                <a:sym typeface="Instrument Sans"/>
-              </a:rPr>
-              <a:t>Humanlaya：</a:t>
-            </a:r>
-            <a:r>
-              <a:rPr lang="zh-CN" sz="900" b="0" i="0" u="none" strike="noStrike" cap="none">
-                <a:solidFill>
-                  <a:srgbClr val="33322F"/>
-                </a:solidFill>
-                <a:latin typeface="Instrument Sans"/>
-                <a:ea typeface="Instrument Sans"/>
-                <a:cs typeface="Instrument Sans"/>
-                <a:sym typeface="Instrument Sans"/>
-              </a:rPr>
-              <a:t>2025年10月成立；2026年9月9日完成数亿元人民币Pre-A，鼎晖领投，</a:t>
-            </a:r>
-            <a:br>
-              <a:rPr lang="zh-CN" sz="900"/>
-            </a:br>
-            <a:r>
-              <a:rPr lang="zh-CN" sz="900" b="0" i="0" u="none" strike="noStrike" cap="none">
-                <a:solidFill>
-                  <a:srgbClr val="33322F"/>
-                </a:solidFill>
-                <a:latin typeface="Instrument Sans"/>
-                <a:ea typeface="Instrument Sans"/>
-                <a:cs typeface="Instrument Sans"/>
-                <a:sym typeface="Instrument Sans"/>
-              </a:rPr>
-              <a:t>红杉中国、今日资本、BAI参投（界面新闻、东方财富）</a:t>
+              <a:t>IDG资本、星连资本、晶泰科技领投</a:t>
             </a:r>
           </a:p>
         </p:txBody>
@@ -32905,7 +33213,7 @@
           <a:p>
             <a:pPr marL="0" marR="0" lvl="0" indent="0" algn="l" rtl="0">
               <a:lnSpc>
-                <a:spcPct val="112000"/>
+                <a:spcPct val="110000"/>
               </a:lnSpc>
               <a:spcBef>
                 <a:spcPts val="0"/>
@@ -32916,7 +33224,7 @@
               <a:buNone/>
             </a:pPr>
             <a:r>
-              <a:rPr lang="zh-CN" sz="900" b="1" i="0" u="none" strike="noStrike" cap="none">
+              <a:rPr lang="zh-CN" sz="850" b="1" i="0" u="none" strike="noStrike" cap="none">
                 <a:solidFill>
                   <a:srgbClr val="111110"/>
                 </a:solidFill>
@@ -32925,10 +33233,10 @@
                 <a:cs typeface="Instrument Sans"/>
                 <a:sym typeface="Instrument Sans"/>
               </a:rPr>
-              <a:t>今天的训练数据采购：</a:t>
-            </a:r>
-            <a:r>
-              <a:rPr lang="zh-CN" sz="900" b="0" i="0" u="none" strike="noStrike" cap="none">
+              <a:t>训练数据供应商收入：</a:t>
+            </a:r>
+            <a:r>
+              <a:rPr lang="zh-CN" sz="850" b="0" i="0" u="none" strike="noStrike" cap="none">
                 <a:solidFill>
                   <a:srgbClr val="33322F"/>
                 </a:solidFill>
@@ -32937,24 +33245,39 @@
                 <a:cs typeface="Instrument Sans"/>
                 <a:sym typeface="Instrument Sans"/>
               </a:rPr>
-              <a:t>Menlo Ventures（2026年7月）：50余家供应商合计约85亿美元</a:t>
+              <a:t>Menlo Ventures合伙人Deedy Das，AI训练数据全景图（2026年7月）：</a:t>
+            </a:r>
+            <a:br>
+              <a:rPr lang="zh-CN" sz="850"/>
+            </a:br>
+            <a:r>
+              <a:rPr lang="zh-CN" sz="850" b="0" i="0" u="none" strike="noStrike" cap="none">
+                <a:solidFill>
+                  <a:srgbClr val="33322F"/>
+                </a:solidFill>
+                <a:latin typeface="Instrument Sans"/>
+                <a:ea typeface="Instrument Sans"/>
+                <a:cs typeface="Instrument Sans"/>
+                <a:sym typeface="Instrument Sans"/>
+              </a:rPr>
+              <a:t>50余家公司合计收入约85亿美元（部分为毛营收）</a:t>
             </a:r>
           </a:p>
           <a:p>
             <a:pPr marL="0" marR="0" lvl="0" indent="0" algn="l" rtl="0">
               <a:lnSpc>
-                <a:spcPct val="112000"/>
+                <a:spcPct val="110000"/>
               </a:lnSpc>
               <a:spcBef>
-                <a:spcPts val="500"/>
-              </a:spcBef>
-              <a:spcAft>
-                <a:spcPts val="0"/>
-              </a:spcAft>
-              <a:buNone/>
-            </a:pPr>
-            <a:r>
-              <a:rPr lang="zh-CN" sz="900" b="1" i="0" u="none" strike="noStrike" cap="none">
+                <a:spcPts val="400"/>
+              </a:spcBef>
+              <a:spcAft>
+                <a:spcPts val="0"/>
+              </a:spcAft>
+              <a:buNone/>
+            </a:pPr>
+            <a:r>
+              <a:rPr lang="zh-CN" sz="850" b="1" i="0" u="none" strike="noStrike" cap="none">
                 <a:solidFill>
                   <a:srgbClr val="111110"/>
                 </a:solidFill>
@@ -32966,7 +33289,7 @@
               <a:t>2030年AI经济推算：</a:t>
             </a:r>
             <a:r>
-              <a:rPr lang="zh-CN" sz="900" b="0" i="0" u="none" strike="noStrike" cap="none">
+              <a:rPr lang="zh-CN" sz="850" b="0" i="0" u="none" strike="noStrike" cap="none">
                 <a:solidFill>
                   <a:srgbClr val="33322F"/>
                 </a:solidFill>
@@ -32975,24 +33298,54 @@
                 <a:cs typeface="Instrument Sans"/>
                 <a:sym typeface="Instrument Sans"/>
               </a:rPr>
-              <a:t>麦肯锡《Agents, robots, and us》（2025年11月）：美国约2.9万亿美元；IMF（2026年4月）：美国GDP 32.4万亿、全球126.3万亿美元；美国以外按一半渗透率推算</a:t>
+              <a:t>麦肯锡《Agents, robots, and us》（2025年11月）：</a:t>
+            </a:r>
+            <a:br>
+              <a:rPr lang="zh-CN" sz="850"/>
+            </a:br>
+            <a:r>
+              <a:rPr lang="zh-CN" sz="850" b="0" i="0" u="none" strike="noStrike" cap="none">
+                <a:solidFill>
+                  <a:srgbClr val="33322F"/>
+                </a:solidFill>
+                <a:latin typeface="Instrument Sans"/>
+                <a:ea typeface="Instrument Sans"/>
+                <a:cs typeface="Instrument Sans"/>
+                <a:sym typeface="Instrument Sans"/>
+              </a:rPr>
+              <a:t>美国约2.9万亿美元（可释放的经济价值）；IMF（2026年4月）：</a:t>
+            </a:r>
+            <a:br>
+              <a:rPr lang="zh-CN" sz="850"/>
+            </a:br>
+            <a:r>
+              <a:rPr lang="zh-CN" sz="850" b="0" i="0" u="none" strike="noStrike" cap="none">
+                <a:solidFill>
+                  <a:srgbClr val="33322F"/>
+                </a:solidFill>
+                <a:latin typeface="Instrument Sans"/>
+                <a:ea typeface="Instrument Sans"/>
+                <a:cs typeface="Instrument Sans"/>
+                <a:sym typeface="Instrument Sans"/>
+              </a:rPr>
+              <a:t>美国GDP 32.4万亿、全球126.3万亿美元；美国以外按一半渗透率推算</a:t>
             </a:r>
           </a:p>
           <a:p>
             <a:pPr marL="0" marR="0" lvl="0" indent="0" algn="l" rtl="0">
               <a:lnSpc>
-                <a:spcPct val="112000"/>
+                <a:spcPct val="110000"/>
               </a:lnSpc>
               <a:spcBef>
-                <a:spcPts val="500"/>
-              </a:spcBef>
-              <a:spcAft>
-                <a:spcPts val="0"/>
-              </a:spcAft>
-              <a:buNone/>
-            </a:pPr>
-            <a:r>
-              <a:rPr lang="zh-CN" sz="900" b="1" i="0" u="none" strike="noStrike" cap="none">
+                <a:spcPts val="400"/>
+              </a:spcBef>
+              <a:spcAft>
+                <a:spcPts val="0"/>
+              </a:spcAft>
+              <a:buNone/>
+            </a:pPr>
+            <a:r>
+              <a:rPr lang="zh-CN" sz="850" b="1" i="0" u="none" strike="noStrike" cap="none">
                 <a:solidFill>
                   <a:srgbClr val="111110"/>
                 </a:solidFill>
@@ -33004,7 +33357,7 @@
               <a:t>训练市场推算：</a:t>
             </a:r>
             <a:r>
-              <a:rPr lang="zh-CN" sz="900" b="0" i="0" u="none" strike="noStrike" cap="none">
+              <a:rPr lang="zh-CN" sz="850" b="0" i="0" u="none" strike="noStrike" cap="none">
                 <a:solidFill>
                   <a:srgbClr val="33322F"/>
                 </a:solidFill>
@@ -33013,13 +33366,51 @@
                 <a:cs typeface="Instrument Sans"/>
                 <a:sym typeface="Instrument Sans"/>
               </a:rPr>
-              <a:t>2030年AI经济 × 10%；</a:t>
+              <a:t>2030年AI经济 × 10%；10%参照大型科技公司研发占收入约10–15%，取下限，为推算假设</a:t>
+            </a:r>
+          </a:p>
+          <a:p>
+            <a:pPr marL="0" marR="0" lvl="0" indent="0" algn="l" rtl="0">
+              <a:lnSpc>
+                <a:spcPct val="110000"/>
+              </a:lnSpc>
+              <a:spcBef>
+                <a:spcPts val="400"/>
+              </a:spcBef>
+              <a:spcAft>
+                <a:spcPts val="0"/>
+              </a:spcAft>
+              <a:buNone/>
+            </a:pPr>
+            <a:r>
+              <a:rPr lang="zh-CN" sz="850" b="1" i="0" u="none" strike="noStrike" cap="none">
+                <a:solidFill>
+                  <a:srgbClr val="111110"/>
+                </a:solidFill>
+                <a:latin typeface="Instrument Sans"/>
+                <a:ea typeface="Instrument Sans"/>
+                <a:cs typeface="Instrument Sans"/>
+                <a:sym typeface="Instrument Sans"/>
+              </a:rPr>
+              <a:t>Agent消费交易：</a:t>
+            </a:r>
+            <a:r>
+              <a:rPr lang="zh-CN" sz="850" b="0" i="0" u="none" strike="noStrike" cap="none">
+                <a:solidFill>
+                  <a:srgbClr val="33322F"/>
+                </a:solidFill>
+                <a:latin typeface="Instrument Sans"/>
+                <a:ea typeface="Instrument Sans"/>
+                <a:cs typeface="Instrument Sans"/>
+                <a:sym typeface="Instrument Sans"/>
+              </a:rPr>
+              <a:t>麦肯锡（2025年10月）：2030年全球由AI Agent完成的消费交易最高3–5万亿美元；</a:t>
             </a:r>
             <a:br>
-              <a:rPr lang="zh-CN" sz="900"/>
+              <a:rPr lang="zh-CN" sz="850"/>
             </a:br>
             <a:r>
-              <a:rPr lang="zh-CN" sz="900" b="0" i="0" u="none" strike="noStrike" cap="none">
+              <a:rPr lang="zh-CN" sz="850" b="0" i="0" u="none" strike="noStrike" cap="none">
                 <a:solidFill>
                   <a:srgbClr val="33322F"/>
                 </a:solidFill>
@@ -33028,24 +33419,24 @@
                 <a:cs typeface="Instrument Sans"/>
                 <a:sym typeface="Instrument Sans"/>
               </a:rPr>
-              <a:t>10%参照大型科技公司研发占收入约10–15%，取下限，为推算假设</a:t>
+              <a:t>蚂蚁国际、万事达、Visa引用（CNBC，2026年9月10日）</a:t>
             </a:r>
           </a:p>
           <a:p>
             <a:pPr marL="0" marR="0" lvl="0" indent="0" algn="l" rtl="0">
               <a:lnSpc>
-                <a:spcPct val="112000"/>
+                <a:spcPct val="110000"/>
               </a:lnSpc>
               <a:spcBef>
-                <a:spcPts val="500"/>
-              </a:spcBef>
-              <a:spcAft>
-                <a:spcPts val="0"/>
-              </a:spcAft>
-              <a:buNone/>
-            </a:pPr>
-            <a:r>
-              <a:rPr lang="zh-CN" sz="900" b="1" i="0" u="none" strike="noStrike" cap="none">
+                <a:spcPts val="400"/>
+              </a:spcBef>
+              <a:spcAft>
+                <a:spcPts val="0"/>
+              </a:spcAft>
+              <a:buNone/>
+            </a:pPr>
+            <a:r>
+              <a:rPr lang="zh-CN" sz="850" b="1" i="0" u="none" strike="noStrike" cap="none">
                 <a:solidFill>
                   <a:srgbClr val="111110"/>
                 </a:solidFill>
@@ -33054,10 +33445,10 @@
                 <a:cs typeface="Instrument Sans"/>
                 <a:sym typeface="Instrument Sans"/>
               </a:rPr>
-              <a:t>AI智能体市场：</a:t>
-            </a:r>
-            <a:r>
-              <a:rPr lang="zh-CN" sz="900" b="0" i="0" u="none" strike="noStrike" cap="none">
+              <a:t>RL环境定价：</a:t>
+            </a:r>
+            <a:r>
+              <a:rPr lang="zh-CN" sz="850" b="0" i="0" u="none" strike="noStrike" cap="none">
                 <a:solidFill>
                   <a:srgbClr val="33322F"/>
                 </a:solidFill>
@@ -33066,24 +33457,24 @@
                 <a:cs typeface="Instrument Sans"/>
                 <a:sym typeface="Instrument Sans"/>
               </a:rPr>
-              <a:t>Precedence Research（2025年79.2亿美元；年复合增长45.82%），2028、2032年按此路径推算</a:t>
+              <a:t>Epoch AI《An FAQ on RL environments》（2026年）</a:t>
             </a:r>
           </a:p>
           <a:p>
             <a:pPr marL="0" marR="0" lvl="0" indent="0" algn="l" rtl="0">
               <a:lnSpc>
-                <a:spcPct val="112000"/>
+                <a:spcPct val="110000"/>
               </a:lnSpc>
               <a:spcBef>
-                <a:spcPts val="500"/>
-              </a:spcBef>
-              <a:spcAft>
-                <a:spcPts val="0"/>
-              </a:spcAft>
-              <a:buNone/>
-            </a:pPr>
-            <a:r>
-              <a:rPr lang="zh-CN" sz="900" b="1" i="0" u="none" strike="noStrike" cap="none">
+                <a:spcPts val="400"/>
+              </a:spcBef>
+              <a:spcAft>
+                <a:spcPts val="0"/>
+              </a:spcAft>
+              <a:buNone/>
+            </a:pPr>
+            <a:r>
+              <a:rPr lang="zh-CN" sz="850" b="1" i="0" u="none" strike="noStrike" cap="none">
                 <a:solidFill>
                   <a:srgbClr val="111110"/>
                 </a:solidFill>
@@ -33092,10 +33483,10 @@
                 <a:cs typeface="Instrument Sans"/>
                 <a:sym typeface="Instrument Sans"/>
               </a:rPr>
-              <a:t>RL环境定价：</a:t>
-            </a:r>
-            <a:r>
-              <a:rPr lang="zh-CN" sz="900" b="0" i="0" u="none" strike="noStrike" cap="none">
+              <a:t>公开文本存量：</a:t>
+            </a:r>
+            <a:r>
+              <a:rPr lang="zh-CN" sz="850" b="0" i="0" u="none" strike="noStrike" cap="none">
                 <a:solidFill>
                   <a:srgbClr val="33322F"/>
                 </a:solidFill>
@@ -33104,24 +33495,24 @@
                 <a:cs typeface="Instrument Sans"/>
                 <a:sym typeface="Instrument Sans"/>
               </a:rPr>
-              <a:t>Epoch AI《An FAQ on RL environments》（2026年1月）</a:t>
+              <a:t>Epoch AI《Will we run out of data?》（2024）：预计2026–2032年间用尽（80%置信区间）</a:t>
             </a:r>
           </a:p>
           <a:p>
             <a:pPr marL="0" marR="0" lvl="0" indent="0" algn="l" rtl="0">
               <a:lnSpc>
-                <a:spcPct val="112000"/>
+                <a:spcPct val="110000"/>
               </a:lnSpc>
               <a:spcBef>
-                <a:spcPts val="500"/>
-              </a:spcBef>
-              <a:spcAft>
-                <a:spcPts val="0"/>
-              </a:spcAft>
-              <a:buNone/>
-            </a:pPr>
-            <a:r>
-              <a:rPr lang="zh-CN" sz="900" b="1" i="0" u="none" strike="noStrike" cap="none">
+                <a:spcPts val="400"/>
+              </a:spcBef>
+              <a:spcAft>
+                <a:spcPts val="0"/>
+              </a:spcAft>
+              <a:buNone/>
+            </a:pPr>
+            <a:r>
+              <a:rPr lang="zh-CN" sz="850" b="1" i="0" u="none" strike="noStrike" cap="none">
                 <a:solidFill>
                   <a:srgbClr val="111110"/>
                 </a:solidFill>
@@ -33130,10 +33521,10 @@
                 <a:cs typeface="Instrument Sans"/>
                 <a:sym typeface="Instrument Sans"/>
               </a:rPr>
-              <a:t>公开文本存量：</a:t>
-            </a:r>
-            <a:r>
-              <a:rPr lang="zh-CN" sz="900" b="0" i="0" u="none" strike="noStrike" cap="none">
+              <a:t>融资与估值：</a:t>
+            </a:r>
+            <a:r>
+              <a:rPr lang="zh-CN" sz="850" b="0" i="0" u="none" strike="noStrike" cap="none">
                 <a:solidFill>
                   <a:srgbClr val="33322F"/>
                 </a:solidFill>
@@ -33142,13 +33533,13 @@
                 <a:cs typeface="Instrument Sans"/>
                 <a:sym typeface="Instrument Sans"/>
               </a:rPr>
-              <a:t>Epoch AI《Will we run out of data?》（2024）：</a:t>
+              <a:t>Applied Compute：Upstarts（2025年6月，种子轮投后1亿美元）；</a:t>
             </a:r>
             <a:br>
-              <a:rPr lang="zh-CN" sz="900"/>
+              <a:rPr lang="zh-CN" sz="850"/>
             </a:br>
             <a:r>
-              <a:rPr lang="zh-CN" sz="900" b="0" i="0" u="none" strike="noStrike" cap="none">
+              <a:rPr lang="zh-CN" sz="850" b="0" i="0" u="none" strike="noStrike" cap="none">
                 <a:solidFill>
                   <a:srgbClr val="33322F"/>
                 </a:solidFill>
@@ -33157,24 +33548,24 @@
                 <a:cs typeface="Instrument Sans"/>
                 <a:sym typeface="Instrument Sans"/>
               </a:rPr>
-              <a:t>预计2026–2032年间用尽（80%置信区间）</a:t>
+              <a:t>福布斯（2026年9月1日，以32.5亿美元估值融资3.5亿美元，融资中）</a:t>
             </a:r>
           </a:p>
           <a:p>
             <a:pPr marL="0" marR="0" lvl="0" indent="0" algn="l" rtl="0">
               <a:lnSpc>
-                <a:spcPct val="112000"/>
+                <a:spcPct val="110000"/>
               </a:lnSpc>
               <a:spcBef>
-                <a:spcPts val="500"/>
-              </a:spcBef>
-              <a:spcAft>
-                <a:spcPts val="0"/>
-              </a:spcAft>
-              <a:buNone/>
-            </a:pPr>
-            <a:r>
-              <a:rPr lang="zh-CN" sz="900" b="1" i="0" u="none" strike="noStrike" cap="none">
+                <a:spcPts val="400"/>
+              </a:spcBef>
+              <a:spcAft>
+                <a:spcPts val="0"/>
+              </a:spcAft>
+              <a:buNone/>
+            </a:pPr>
+            <a:r>
+              <a:rPr lang="zh-CN" sz="850" b="1" i="0" u="none" strike="noStrike" cap="none">
                 <a:solidFill>
                   <a:srgbClr val="111110"/>
                 </a:solidFill>
@@ -33183,10 +33574,10 @@
                 <a:cs typeface="Instrument Sans"/>
                 <a:sym typeface="Instrument Sans"/>
               </a:rPr>
-              <a:t>融资与估值：</a:t>
-            </a:r>
-            <a:r>
-              <a:rPr lang="zh-CN" sz="900" b="0" i="0" u="none" strike="noStrike" cap="none">
+              <a:t>个人Agent：</a:t>
+            </a:r>
+            <a:r>
+              <a:rPr lang="zh-CN" sz="850" b="0" i="0" u="none" strike="noStrike" cap="none">
                 <a:solidFill>
                   <a:srgbClr val="33322F"/>
                 </a:solidFill>
@@ -33195,13 +33586,13 @@
                 <a:cs typeface="Instrument Sans"/>
                 <a:sym typeface="Instrument Sans"/>
               </a:rPr>
-              <a:t>Applied Compute：Upstarts（2025年6月，种子轮2,000万美元，投后1亿美元）；</a:t>
+              <a:t>Meta Muse（2026年9月8日上线，9月18日登顶美国App Store；</a:t>
             </a:r>
             <a:br>
-              <a:rPr lang="zh-CN" sz="900"/>
+              <a:rPr lang="zh-CN" sz="850"/>
             </a:br>
             <a:r>
-              <a:rPr lang="zh-CN" sz="900" b="0" i="0" u="none" strike="noStrike" cap="none">
+              <a:rPr lang="zh-CN" sz="850" b="0" i="0" u="none" strike="noStrike" cap="none">
                 <a:solidFill>
                   <a:srgbClr val="33322F"/>
                 </a:solidFill>
@@ -33210,24 +33601,39 @@
                 <a:cs typeface="Instrument Sans"/>
                 <a:sym typeface="Instrument Sans"/>
               </a:rPr>
-              <a:t>The Information（2026年8月，约30亿美元洽谈）</a:t>
+              <a:t>TechCrunch、Business Insider）；OpenAI Dots（DevDay，2026年9月29日）；</a:t>
+            </a:r>
+            <a:br>
+              <a:rPr lang="zh-CN" sz="850"/>
+            </a:br>
+            <a:r>
+              <a:rPr lang="zh-CN" sz="850" b="0" i="0" u="none" strike="noStrike" cap="none">
+                <a:solidFill>
+                  <a:srgbClr val="33322F"/>
+                </a:solidFill>
+                <a:latin typeface="Instrument Sans"/>
+                <a:ea typeface="Instrument Sans"/>
+                <a:cs typeface="Instrument Sans"/>
+                <a:sym typeface="Instrument Sans"/>
+              </a:rPr>
+              <a:t>千问Personal Agent（云栖大会，2026年9月22日）；Manus Cue（2026年9月28日，彭博）</a:t>
             </a:r>
           </a:p>
           <a:p>
             <a:pPr marL="0" marR="0" lvl="0" indent="0" algn="l" rtl="0">
               <a:lnSpc>
-                <a:spcPct val="112000"/>
+                <a:spcPct val="110000"/>
               </a:lnSpc>
               <a:spcBef>
-                <a:spcPts val="500"/>
-              </a:spcBef>
-              <a:spcAft>
-                <a:spcPts val="0"/>
-              </a:spcAft>
-              <a:buNone/>
-            </a:pPr>
-            <a:r>
-              <a:rPr lang="zh-CN" sz="900" b="1" i="0" u="none" strike="noStrike" cap="none">
+                <a:spcPts val="400"/>
+              </a:spcBef>
+              <a:spcAft>
+                <a:spcPts val="0"/>
+              </a:spcAft>
+              <a:buNone/>
+            </a:pPr>
+            <a:r>
+              <a:rPr lang="zh-CN" sz="850" b="1" i="0" u="none" strike="noStrike" cap="none">
                 <a:solidFill>
                   <a:srgbClr val="111110"/>
                 </a:solidFill>
@@ -33236,10 +33642,10 @@
                 <a:cs typeface="Instrument Sans"/>
                 <a:sym typeface="Instrument Sans"/>
               </a:rPr>
-              <a:t>个人agent：</a:t>
-            </a:r>
-            <a:r>
-              <a:rPr lang="zh-CN" sz="900" b="0" i="0" u="none" strike="noStrike" cap="none">
+              <a:t>Instinct：</a:t>
+            </a:r>
+            <a:r>
+              <a:rPr lang="zh-CN" sz="850" b="0" i="0" u="none" strike="noStrike" cap="none">
                 <a:solidFill>
                   <a:srgbClr val="33322F"/>
                 </a:solidFill>
@@ -33248,13 +33654,13 @@
                 <a:cs typeface="Instrument Sans"/>
                 <a:sym typeface="Instrument Sans"/>
               </a:rPr>
-              <a:t>Meta Muse上线（2026年9月8日，Axios、CNBC）；</a:t>
+              <a:t>路透社、TechCrunch（2026年9月28日）：融资10亿美元，估值100亿美元；</a:t>
             </a:r>
             <a:br>
-              <a:rPr lang="zh-CN" sz="900"/>
+              <a:rPr lang="zh-CN" sz="850"/>
             </a:br>
             <a:r>
-              <a:rPr lang="zh-CN" sz="900" b="0" i="0" u="none" strike="noStrike" cap="none">
+              <a:rPr lang="zh-CN" sz="850" b="0" i="0" u="none" strike="noStrike" cap="none">
                 <a:solidFill>
                   <a:srgbClr val="33322F"/>
                 </a:solidFill>
@@ -33263,13 +33669,89 @@
                 <a:cs typeface="Instrument Sans"/>
                 <a:sym typeface="Instrument Sans"/>
               </a:rPr>
-              <a:t>彭博（2026年9月21日）：亚马逊屏蔽Muse；</a:t>
+              <a:t>红杉、Benchmark、Coatue投资；8月26日估值25亿美元；创始人23岁</a:t>
+            </a:r>
+          </a:p>
+          <a:p>
+            <a:pPr marL="0" marR="0" lvl="0" indent="0" algn="l" rtl="0">
+              <a:lnSpc>
+                <a:spcPct val="110000"/>
+              </a:lnSpc>
+              <a:spcBef>
+                <a:spcPts val="400"/>
+              </a:spcBef>
+              <a:spcAft>
+                <a:spcPts val="0"/>
+              </a:spcAft>
+              <a:buNone/>
+            </a:pPr>
+            <a:r>
+              <a:rPr lang="zh-CN" sz="850" b="1" i="0" u="none" strike="noStrike" cap="none">
+                <a:solidFill>
+                  <a:srgbClr val="111110"/>
+                </a:solidFill>
+                <a:latin typeface="Instrument Sans"/>
+                <a:ea typeface="Instrument Sans"/>
+                <a:cs typeface="Instrument Sans"/>
+                <a:sym typeface="Instrument Sans"/>
+              </a:rPr>
+              <a:t>Remote Labor Index：</a:t>
+            </a:r>
+            <a:r>
+              <a:rPr lang="zh-CN" sz="850" b="0" i="0" u="none" strike="noStrike" cap="none">
+                <a:solidFill>
+                  <a:srgbClr val="33322F"/>
+                </a:solidFill>
+                <a:latin typeface="Instrument Sans"/>
+                <a:ea typeface="Instrument Sans"/>
+                <a:cs typeface="Instrument Sans"/>
+                <a:sym typeface="Instrument Sans"/>
+              </a:rPr>
+              <a:t>Scale AI与CAIS（2026年7月）：最强模型按付费客户标准完成16.1%的真实外包项目</a:t>
+            </a:r>
+          </a:p>
+          <a:p>
+            <a:pPr marL="0" marR="0" lvl="0" indent="0" algn="l" rtl="0">
+              <a:lnSpc>
+                <a:spcPct val="110000"/>
+              </a:lnSpc>
+              <a:spcBef>
+                <a:spcPts val="400"/>
+              </a:spcBef>
+              <a:spcAft>
+                <a:spcPts val="0"/>
+              </a:spcAft>
+              <a:buNone/>
+            </a:pPr>
+            <a:r>
+              <a:rPr lang="zh-CN" sz="850" b="1" i="0" u="none" strike="noStrike" cap="none">
+                <a:solidFill>
+                  <a:srgbClr val="111110"/>
+                </a:solidFill>
+                <a:latin typeface="Instrument Sans"/>
+                <a:ea typeface="Instrument Sans"/>
+                <a:cs typeface="Instrument Sans"/>
+                <a:sym typeface="Instrument Sans"/>
+              </a:rPr>
+              <a:t>事件预测：</a:t>
+            </a:r>
+            <a:r>
+              <a:rPr lang="zh-CN" sz="850" b="0" i="0" u="none" strike="noStrike" cap="none">
+                <a:solidFill>
+                  <a:srgbClr val="33322F"/>
+                </a:solidFill>
+                <a:latin typeface="Instrument Sans"/>
+                <a:ea typeface="Instrument Sans"/>
+                <a:cs typeface="Instrument Sans"/>
+                <a:sym typeface="Instrument Sans"/>
+              </a:rPr>
+              <a:t>PolyBench（arXiv 2604.14199，2026年4月）：</a:t>
             </a:r>
             <a:br>
-              <a:rPr lang="zh-CN" sz="900"/>
+              <a:rPr lang="zh-CN" sz="850"/>
             </a:br>
             <a:r>
-              <a:rPr lang="zh-CN" sz="900" b="0" i="0" u="none" strike="noStrike" cap="none">
+              <a:rPr lang="zh-CN" sz="850" b="0" i="0" u="none" strike="noStrike" cap="none">
                 <a:solidFill>
                   <a:srgbClr val="33322F"/>
                 </a:solidFill>
@@ -33278,113 +33760,7 @@
                 <a:cs typeface="Instrument Sans"/>
                 <a:sym typeface="Instrument Sans"/>
               </a:rPr>
-              <a:t>OpenAI DevDay发布常驻agent Dots（2026年9月29日，TechCrunch、CNBC）</a:t>
-            </a:r>
-          </a:p>
-          <a:p>
-            <a:pPr marL="0" marR="0" lvl="0" indent="0" algn="l" rtl="0">
-              <a:lnSpc>
-                <a:spcPct val="112000"/>
-              </a:lnSpc>
-              <a:spcBef>
-                <a:spcPts val="500"/>
-              </a:spcBef>
-              <a:spcAft>
-                <a:spcPts val="0"/>
-              </a:spcAft>
-              <a:buNone/>
-            </a:pPr>
-            <a:r>
-              <a:rPr lang="zh-CN" sz="900" b="1" i="0" u="none" strike="noStrike" cap="none">
-                <a:solidFill>
-                  <a:srgbClr val="111110"/>
-                </a:solidFill>
-                <a:latin typeface="Instrument Sans"/>
-                <a:ea typeface="Instrument Sans"/>
-                <a:cs typeface="Instrument Sans"/>
-                <a:sym typeface="Instrument Sans"/>
-              </a:rPr>
-              <a:t>Instinct：</a:t>
-            </a:r>
-            <a:r>
-              <a:rPr lang="zh-CN" sz="900" b="0" i="0" u="none" strike="noStrike" cap="none">
-                <a:solidFill>
-                  <a:srgbClr val="33322F"/>
-                </a:solidFill>
-                <a:latin typeface="Instrument Sans"/>
-                <a:ea typeface="Instrument Sans"/>
-                <a:cs typeface="Instrument Sans"/>
-                <a:sym typeface="Instrument Sans"/>
-              </a:rPr>
-              <a:t>Business Wire（2026年9月28日）：10亿美元C轮，估值100亿美元；</a:t>
-            </a:r>
-            <a:br>
-              <a:rPr lang="zh-CN" sz="900"/>
-            </a:br>
-            <a:r>
-              <a:rPr lang="zh-CN" sz="900" b="0" i="0" u="none" strike="noStrike" cap="none">
-                <a:solidFill>
-                  <a:srgbClr val="33322F"/>
-                </a:solidFill>
-                <a:latin typeface="Instrument Sans"/>
-                <a:ea typeface="Instrument Sans"/>
-                <a:cs typeface="Instrument Sans"/>
-                <a:sym typeface="Instrument Sans"/>
-              </a:rPr>
-              <a:t>红杉、Benchmark、Coatue投资；33天前估值25亿美元</a:t>
-            </a:r>
-          </a:p>
-          <a:p>
-            <a:pPr marL="0" marR="0" lvl="0" indent="0" algn="l" rtl="0">
-              <a:lnSpc>
-                <a:spcPct val="112000"/>
-              </a:lnSpc>
-              <a:spcBef>
-                <a:spcPts val="500"/>
-              </a:spcBef>
-              <a:spcAft>
-                <a:spcPts val="0"/>
-              </a:spcAft>
-              <a:buNone/>
-            </a:pPr>
-            <a:r>
-              <a:rPr lang="zh-CN" sz="900" b="1" i="0" u="none" strike="noStrike" cap="none">
-                <a:solidFill>
-                  <a:srgbClr val="111110"/>
-                </a:solidFill>
-                <a:latin typeface="Instrument Sans"/>
-                <a:ea typeface="Instrument Sans"/>
-                <a:cs typeface="Instrument Sans"/>
-                <a:sym typeface="Instrument Sans"/>
-              </a:rPr>
-              <a:t>Remote Labor Index：</a:t>
-            </a:r>
-            <a:r>
-              <a:rPr lang="zh-CN" sz="900" b="0" i="0" u="none" strike="noStrike" cap="none">
-                <a:solidFill>
-                  <a:srgbClr val="33322F"/>
-                </a:solidFill>
-                <a:latin typeface="Instrument Sans"/>
-                <a:ea typeface="Instrument Sans"/>
-                <a:cs typeface="Instrument Sans"/>
-                <a:sym typeface="Instrument Sans"/>
-              </a:rPr>
-              <a:t>Scale AI与CAIS（2026年7月）：</a:t>
-            </a:r>
-            <a:br>
-              <a:rPr lang="zh-CN" sz="900"/>
-            </a:br>
-            <a:r>
-              <a:rPr lang="zh-CN" sz="900" b="0" i="0" u="none" strike="noStrike" cap="none">
-                <a:solidFill>
-                  <a:srgbClr val="33322F"/>
-                </a:solidFill>
-                <a:latin typeface="Instrument Sans"/>
-                <a:ea typeface="Instrument Sans"/>
-                <a:cs typeface="Instrument Sans"/>
-                <a:sym typeface="Instrument Sans"/>
-              </a:rPr>
-              <a:t>最强模型按付费客户标准完成16.1%的真实外包项目</a:t>
+              <a:t>7个前沿模型在38,666个Polymarket市场模拟交易，仅2个取得正收益</a:t>
             </a:r>
           </a:p>
         </p:txBody>
@@ -34462,7 +34838,22 @@
                 <a:cs typeface="Instrument Sans"/>
                 <a:sym typeface="Instrument Sans"/>
               </a:rPr>
-              <a:t>AI用自己在真实环境中的结果训练自己，一轮比一轮强</a:t>
+              <a:t>递归式自我改进：AI参与改进下一代AI；</a:t>
+            </a:r>
+            <a:br>
+              <a:rPr lang="zh-CN" sz="1100"/>
+            </a:br>
+            <a:r>
+              <a:rPr lang="zh-CN" sz="1100" b="0" i="0" u="none" strike="noStrike" cap="none">
+                <a:solidFill>
+                  <a:srgbClr val="33322F"/>
+                </a:solidFill>
+                <a:latin typeface="Instrument Sans"/>
+                <a:ea typeface="Instrument Sans"/>
+                <a:cs typeface="Instrument Sans"/>
+                <a:sym typeface="Instrument Sans"/>
+              </a:rPr>
+              <a:t>每轮真实结果都成为下一轮的训练数据</a:t>
             </a:r>
           </a:p>
         </p:txBody>
@@ -37473,7 +37864,7 @@
                 <a:cs typeface="Newsreader"/>
                 <a:sym typeface="Newsreader"/>
               </a:rPr>
-              <a:t>Mercor 18个月内收入涨27倍、估值涨10倍：</a:t>
+              <a:t>Mercor 16个月收入涨27倍，估值洽谈至200亿美元：</a:t>
             </a:r>
             <a:r>
               <a:rPr lang="zh-CN" sz="1600" b="0" i="0" u="none" strike="noStrike" cap="none">
@@ -37921,7 +38312,7 @@
                 <a:cs typeface="IBM Plex Mono"/>
                 <a:sym typeface="IBM Plex Mono"/>
               </a:rPr>
-              <a:t>需求增长</a:t>
+              <a:t>Agent替人花钱</a:t>
             </a:r>
           </a:p>
         </p:txBody>
@@ -37970,7 +38361,7 @@
                 <a:cs typeface="Newsreader"/>
                 <a:sym typeface="Newsreader"/>
               </a:rPr>
-              <a:t>14倍</a:t>
+              <a:t>3–5万亿美元</a:t>
             </a:r>
           </a:p>
         </p:txBody>
@@ -38022,7 +38413,7 @@
                 <a:cs typeface="Instrument Sans"/>
                 <a:sym typeface="Instrument Sans"/>
               </a:rPr>
-              <a:t>AI智能体市场预测：7年，79亿→约1,110亿美元</a:t>
+              <a:t>2030年全球由AI Agent完成的消费交易（麦肯锡）</a:t>
             </a:r>
           </a:p>
         </p:txBody>
@@ -38481,7 +38872,7 @@
                 <a:cs typeface="Newsreader"/>
                 <a:sym typeface="Newsreader"/>
               </a:rPr>
-              <a:t>近一半</a:t>
+              <a:t>15亿美元+</a:t>
             </a:r>
           </a:p>
         </p:txBody>
@@ -38530,7 +38921,7 @@
                 <a:cs typeface="Instrument Sans"/>
                 <a:sym typeface="Instrument Sans"/>
               </a:rPr>
-              <a:t>Scale AI新训练项目已涉及RL环境</a:t>
+              <a:t>谷歌与RL环境公司Mechanize的交易（据报道）</a:t>
             </a:r>
           </a:p>
         </p:txBody>
@@ -38657,7 +39048,7 @@
                 <a:cs typeface="Instrument Sans"/>
                 <a:sym typeface="Instrument Sans"/>
               </a:rPr>
-              <a:t>AfterQuery估值：3亿→32亿美元</a:t>
+              <a:t>AfterQuery估值：3亿→32亿美元（据报道）</a:t>
             </a:r>
           </a:p>
         </p:txBody>
@@ -38735,7 +39126,7 @@
                 <a:cs typeface="Newsreader"/>
                 <a:sym typeface="Newsreader"/>
               </a:rPr>
-              <a:t>2032年前</a:t>
+              <a:t>2026–2032</a:t>
             </a:r>
           </a:p>
         </p:txBody>
@@ -38784,7 +39175,7 @@
                 <a:cs typeface="Instrument Sans"/>
                 <a:sym typeface="Instrument Sans"/>
               </a:rPr>
-              <a:t>公开的人类文本预计被用尽</a:t>
+              <a:t>年间，公开的人类文本预计被用尽</a:t>
             </a:r>
           </a:p>
         </p:txBody>
@@ -38894,7 +39285,7 @@
                 <a:cs typeface="Instrument Sans"/>
                 <a:sym typeface="Instrument Sans"/>
               </a:rPr>
-              <a:t>来源：Mercor（TechCrunch、Sacra、Dealroom、彭博）；AfterQuery（Business Wire、福布斯）；Snorkel AI（公司公告）；Scale AI（路透社、公司博客）；AI智能体（Precedence Research）；文本存量（Epoch AI）。详见A2。</a:t>
+              <a:t>来源：Mercor（TechCrunch、Sacra、Dealroom、彭博、The Information）；AfterQuery（Business Wire、福布斯）；Snorkel AI（路透社）；Scale AI（路透社）；Mechanize（Business Insider）；Agent消费交易（麦肯锡，经CNBC）；文本存量（Epoch AI）。详见A2。</a:t>
             </a:r>
           </a:p>
         </p:txBody>
@@ -40505,7 +40896,7 @@
                 <a:cs typeface="Newsreader"/>
                 <a:sym typeface="Newsreader"/>
               </a:rPr>
-              <a:t>结果一出就落空</a:t>
+              <a:t>照着下注却亏钱</a:t>
             </a:r>
           </a:p>
         </p:txBody>
@@ -42170,7 +42561,7 @@
                 <a:cs typeface="Newsreader"/>
                 <a:sym typeface="Newsreader"/>
               </a:rPr>
-              <a:t>自主运行与自我进化</a:t>
+              <a:t>真实结果驱动的自我进化</a:t>
             </a:r>
           </a:p>
         </p:txBody>
@@ -42268,7 +42659,7 @@
                 <a:cs typeface="Newsreader"/>
                 <a:sym typeface="Newsreader"/>
               </a:rPr>
-              <a:t>考满分的AI，未必能放心交付。下一代AI的进步，</a:t>
+              <a:t>考满分的AI，未必能放心托付。下一代AI的进步，</a:t>
             </a:r>
             <a:r>
               <a:rPr lang="zh-CN" sz="2200" b="0" i="0" u="none" strike="noStrike" cap="none">
@@ -45482,7 +45873,7 @@
                 <a:cs typeface="Instrument Sans"/>
                 <a:sym typeface="Instrument Sans"/>
               </a:rPr>
-              <a:t>GPT 6</a:t>
+              <a:t>GPT-6</a:t>
             </a:r>
           </a:p>
         </p:txBody>
